--- a/probability_and_statistics/5_inference/hypothesis-testing/Hypothesis-1-Null-Alternate-NEW.pptx
+++ b/probability_and_statistics/5_inference/hypothesis-testing/Hypothesis-1-Null-Alternate-NEW.pptx
@@ -16,8 +16,8 @@
     <p:sldId id="283" r:id="rId4"/>
     <p:sldId id="278" r:id="rId5"/>
     <p:sldId id="285" r:id="rId6"/>
-    <p:sldId id="268" r:id="rId7"/>
-    <p:sldId id="286" r:id="rId8"/>
+    <p:sldId id="286" r:id="rId7"/>
+    <p:sldId id="268" r:id="rId8"/>
     <p:sldId id="270" r:id="rId9"/>
     <p:sldId id="279" r:id="rId10"/>
     <p:sldId id="267" r:id="rId11"/>
@@ -229,7 +229,7 @@
           <a:p>
             <a:fld id="{7BAEECA8-D063-486F-AE31-5020270C1449}" type="datetimeFigureOut">
               <a:rPr lang="en-US" smtClean="0"/>
-              <a:t>4/12/2026</a:t>
+              <a:t>5/4/2026</a:t>
             </a:fld>
             <a:endParaRPr lang="en-US"/>
           </a:p>
@@ -344,7 +344,38 @@
           <inkml:channelProperty channel="OE" name="resolution" value="1000" units="1/deg"/>
         </inkml:channelProperties>
       </inkml:inkSource>
-      <inkml:timestamp xml:id="ts0" timeString="2026-04-12T05:28:35.738"/>
+      <inkml:timestamp xml:id="ts0" timeString="2025-10-02T06:30:36.981"/>
+    </inkml:context>
+    <inkml:brush xml:id="br0">
+      <inkml:brushProperty name="width" value="0.2" units="cm"/>
+      <inkml:brushProperty name="height" value="0.2" units="cm"/>
+    </inkml:brush>
+  </inkml:definitions>
+  <inkml:trace contextRef="#ctx0" brushRef="#br0">30 78 2772 0 0,'-30'-19'2604'0'0,"38"15"-2590"0"0,0 2-1 0 0,-1-1 1 0 0,1 1 0 0 0,0 0-1 0 0,0 0 1 0 0,14 0 0 0 0,565-35 46 0 0,2 32 7 0 0,-490 5-42 0 0,-75 4 37 0 0,-24-4-59 0 0,0 0-1 0 0,0 0 1 0 0,1 0 0 0 0,-1 0-1 0 0,0 0 1 0 0,0 0-1 0 0,0 0 1 0 0,0 1 0 0 0,1-1-1 0 0,-1 0 1 0 0,0 0 0 0 0,0 0-1 0 0,0 0 1 0 0,0 1 0 0 0,0-1-1 0 0,1 0 1 0 0,-1 0 0 0 0,0 0-1 0 0,0 0 1 0 0,0 1-1 0 0,0-1 1 0 0,0 0 0 0 0,0 0-1 0 0,0 0 1 0 0,0 1 0 0 0,0-1-1 0 0,0 0 1 0 0,0 0 0 0 0,0 0-1 0 0,0 1 1 0 0,0-1-1 0 0,0 0 1 0 0,0 0 0 0 0,0 0-1 0 0,0 1 1 0 0,0-1 0 0 0,0 0-1 0 0,0 0 1 0 0,0 0 0 0 0,0 1-1 0 0,-1-1 1 0 0,1 0 0 0 0,0 0-1 0 0,0 0 1 0 0,0 1-1 0 0,-3 1 8 0 0,1 0-1 0 0,-1 0 1 0 0,0 0-1 0 0,0 0 1 0 0,0-1-1 0 0,0 1 1 0 0,0-1-1 0 0,0 1 0 0 0,-4 0 1 0 0,-370 92 275 0 0,323-82-207 0 0,-448 104 472 0 0,576-113-498 0 0,268-13-336 0 0,-334 16-335 0 0,-31 8-3489 0 0</inkml:trace>
+</inkml:ink>
+</file>
+
+<file path=ppt/ink/ink10.xml><?xml version="1.0" encoding="utf-8"?>
+<inkml:ink xmlns:inkml="http://www.w3.org/2003/InkML">
+  <inkml:definitions>
+    <inkml:context xml:id="ctx0">
+      <inkml:inkSource xml:id="inkSrc0">
+        <inkml:traceFormat>
+          <inkml:channel name="X" type="integer" min="-2.14748E9" max="2.14748E9" units="cm"/>
+          <inkml:channel name="Y" type="integer" min="-2.14748E9" max="2.14748E9" units="cm"/>
+          <inkml:channel name="F" type="integer" max="32767" units="dev"/>
+          <inkml:channel name="OA" type="integer" max="360" units="deg"/>
+          <inkml:channel name="OE" type="integer" max="90" units="deg"/>
+        </inkml:traceFormat>
+        <inkml:channelProperties>
+          <inkml:channelProperty channel="X" name="resolution" value="1000" units="1/cm"/>
+          <inkml:channelProperty channel="Y" name="resolution" value="1000" units="1/cm"/>
+          <inkml:channelProperty channel="F" name="resolution" value="0" units="1/dev"/>
+          <inkml:channelProperty channel="OA" name="resolution" value="1000" units="1/deg"/>
+          <inkml:channelProperty channel="OE" name="resolution" value="1000" units="1/deg"/>
+        </inkml:channelProperties>
+      </inkml:inkSource>
+      <inkml:timestamp xml:id="ts0" timeString="2026-04-12T05:28:45.048"/>
     </inkml:context>
     <inkml:brush xml:id="br0">
       <inkml:brushProperty name="width" value="0.2" units="cm"/>
@@ -352,11 +383,43 @@
       <inkml:brushProperty name="color" value="#FF0066"/>
     </inkml:brush>
   </inkml:definitions>
-  <inkml:trace contextRef="#ctx0" brushRef="#br0">60 38 5665 0 0,'-55'-36'-433'0'0,"53"35"752"0"0,-1 10-363 0 0,8 21 19 0 0,44 200 82 0 0,-37-181 152 0 0,-3 2 0 0 0,6 98 0 0 0,-12-135 64 0 0,3-47-4856 0 0</inkml:trace>
+  <inkml:trace contextRef="#ctx0" brushRef="#br0">50 258 4108 0 0,'-5'1'-238'0'0,"1"1"0"0"0,0-1 0 0 0,-1 1-1 0 0,1 0 1 0 0,0 0 0 0 0,0 1 0 0 0,-6 4-1 0 0,2-1 143 0 0,6-5 160 0 0,32-6 506 0 0,0 0 0 0 0,-1-2 0 0 0,50-19 0 0 0,-67 21-507 0 0,-1 1-1 0 0,0-2 1 0 0,0 1-1 0 0,19-15 0 0 0,-27 19-15 0 0,0-1-1 0 0,-1-1 0 0 0,0 1 0 0 0,1 0 1 0 0,-1-1-1 0 0,0 1 0 0 0,0-1 1 0 0,0 1-1 0 0,-1-1 0 0 0,1 0 1 0 0,0 0-1 0 0,-1 0 0 0 0,0 0 0 0 0,0 0 1 0 0,0 0-1 0 0,0 0 0 0 0,0 0 1 0 0,-1-1-1 0 0,1 1 0 0 0,-1 0 0 0 0,0 0 1 0 0,0-1-1 0 0,0 1 0 0 0,-1 0 1 0 0,0-4-1 0 0,-3-8 148 0 0,-2 1 0 0 0,0 0 0 0 0,0 1 0 0 0,-1-1-1 0 0,-15-19 1 0 0,22 32-108 0 0,-18-20-68 0 0,17 27-22 0 0,-1-1-1 0 0,1 1 1 0 0,1 0 0 0 0,-1-1-1 0 0,1 1 1 0 0,0 0-1 0 0,0-1 1 0 0,0 1 0 0 0,1 0-1 0 0,0 0 1 0 0,3 10-1 0 0,2 5-12 0 0,5 32 14 0 0,2-1-1 0 0,2-1 0 0 0,23 50 0 0 0,-17-46 44 0 0,-9-8-350 0 0,15-91-2691 0 0,-16 27 980 0 0</inkml:trace>
 </inkml:ink>
 </file>
 
-<file path=ppt/ink/ink10.xml><?xml version="1.0" encoding="utf-8"?>
+<file path=ppt/ink/ink11.xml><?xml version="1.0" encoding="utf-8"?>
+<inkml:ink xmlns:inkml="http://www.w3.org/2003/InkML">
+  <inkml:definitions>
+    <inkml:context xml:id="ctx0">
+      <inkml:inkSource xml:id="inkSrc0">
+        <inkml:traceFormat>
+          <inkml:channel name="X" type="integer" min="-2.14748E9" max="2.14748E9" units="cm"/>
+          <inkml:channel name="Y" type="integer" min="-2.14748E9" max="2.14748E9" units="cm"/>
+          <inkml:channel name="F" type="integer" max="32767" units="dev"/>
+          <inkml:channel name="OA" type="integer" max="360" units="deg"/>
+          <inkml:channel name="OE" type="integer" max="90" units="deg"/>
+        </inkml:traceFormat>
+        <inkml:channelProperties>
+          <inkml:channelProperty channel="X" name="resolution" value="1000" units="1/cm"/>
+          <inkml:channelProperty channel="Y" name="resolution" value="1000" units="1/cm"/>
+          <inkml:channelProperty channel="F" name="resolution" value="0" units="1/dev"/>
+          <inkml:channelProperty channel="OA" name="resolution" value="1000" units="1/deg"/>
+          <inkml:channelProperty channel="OE" name="resolution" value="1000" units="1/deg"/>
+        </inkml:channelProperties>
+      </inkml:inkSource>
+      <inkml:timestamp xml:id="ts0" timeString="2026-04-12T05:28:45.561"/>
+    </inkml:context>
+    <inkml:brush xml:id="br0">
+      <inkml:brushProperty name="width" value="0.2" units="cm"/>
+      <inkml:brushProperty name="height" value="0.2" units="cm"/>
+      <inkml:brushProperty name="color" value="#FF0066"/>
+    </inkml:brush>
+  </inkml:definitions>
+  <inkml:trace contextRef="#ctx0" brushRef="#br0">56 0 5048 0 0,'0'0'-277'0'0,"-9"7"-1063"0"0,5-4 1332 0 0,0 1-1 0 0,0-1 0 0 0,0 1 0 0 0,1 0 0 0 0,-1 0 0 0 0,1 1 0 0 0,0-1 1 0 0,0 1-1 0 0,1 0 0 0 0,-1-1 0 0 0,1 1 0 0 0,0 0 0 0 0,0 0 0 0 0,-1 7 1 0 0,3-9 20 0 0,0-1 0 0 0,-1 1 0 0 0,1-1 0 0 0,0 0 0 0 0,1 1 1 0 0,-1-1-1 0 0,0 1 0 0 0,1-1 0 0 0,-1 1 0 0 0,1-1 0 0 0,0 0 1 0 0,-1 0-1 0 0,1 1 0 0 0,0-1 0 0 0,1 0 0 0 0,-1 0 0 0 0,0 0 1 0 0,0 0-1 0 0,1 0 0 0 0,0 0 0 0 0,-1 0 0 0 0,1 0 0 0 0,0-1 1 0 0,0 1-1 0 0,0-1 0 0 0,0 1 0 0 0,0-1 0 0 0,0 0 0 0 0,0 0 1 0 0,0 0-1 0 0,1 0 0 0 0,-1 0 0 0 0,0 0 0 0 0,1-1 0 0 0,-1 1 1 0 0,0-1-1 0 0,1 1 0 0 0,3-1 0 0 0,8 2 159 0 0,-1 0 1 0 0,0-1-1 0 0,1 0 1 0 0,16-2-1 0 0,-26 1-82 0 0,-1 0 0 0 0,1-1 1 0 0,0 1-1 0 0,0-1 0 0 0,-1 0 0 0 0,1 0 1 0 0,-1 0-1 0 0,1-1 0 0 0,-1 1 0 0 0,1-1 1 0 0,-1 0-1 0 0,0 0 0 0 0,0 0 0 0 0,0 0 0 0 0,0-1 1 0 0,0 1-1 0 0,0-1 0 0 0,-1 0 0 0 0,1 0 1 0 0,2-4-1 0 0,-4 6-64 0 0,-1 1 0 0 0,1-1 0 0 0,-1 0 0 0 0,1 0 0 0 0,-1 0 0 0 0,0 0 0 0 0,1 0 0 0 0,-1 1 0 0 0,0-1 0 0 0,0 0 0 0 0,1 0 0 0 0,-1 0 0 0 0,0 0 0 0 0,0 0 0 0 0,0 0 0 0 0,0 0 0 0 0,0 0-1 0 0,-1 0 1 0 0,1 0 0 0 0,0 0 0 0 0,0 1 0 0 0,-1-1 0 0 0,1 0 0 0 0,0 0 0 0 0,-1 0 0 0 0,1 0 0 0 0,-1 0 0 0 0,0-1 0 0 0,-1 1 8 0 0,1 0-1 0 0,-1-1 0 0 0,0 1 1 0 0,0 0-1 0 0,1 0 1 0 0,-1 0-1 0 0,0 0 0 0 0,0 0 1 0 0,0 1-1 0 0,0-1 1 0 0,-4 0-1 0 0,-45-2 142 0 0,-24 21-626 0 0,30-3-2907 0 0</inkml:trace>
+</inkml:ink>
+</file>
+
+<file path=ppt/ink/ink12.xml><?xml version="1.0" encoding="utf-8"?>
 <inkml:ink xmlns:inkml="http://www.w3.org/2003/InkML">
   <inkml:definitions>
     <inkml:context xml:id="ctx0">
@@ -388,7 +451,7 @@
 </inkml:ink>
 </file>
 
-<file path=ppt/ink/ink11.xml><?xml version="1.0" encoding="utf-8"?>
+<file path=ppt/ink/ink13.xml><?xml version="1.0" encoding="utf-8"?>
 <inkml:ink xmlns:inkml="http://www.w3.org/2003/InkML">
   <inkml:definitions>
     <inkml:context xml:id="ctx0">
@@ -420,7 +483,7 @@
 </inkml:ink>
 </file>
 
-<file path=ppt/ink/ink12.xml><?xml version="1.0" encoding="utf-8"?>
+<file path=ppt/ink/ink14.xml><?xml version="1.0" encoding="utf-8"?>
 <inkml:ink xmlns:inkml="http://www.w3.org/2003/InkML">
   <inkml:definitions>
     <inkml:context xml:id="ctx0">
@@ -452,161 +515,7 @@
 </inkml:ink>
 </file>
 
-<file path=ppt/ink/ink13.xml><?xml version="1.0" encoding="utf-8"?>
-<inkml:ink xmlns:inkml="http://www.w3.org/2003/InkML">
-  <inkml:definitions>
-    <inkml:context xml:id="ctx0">
-      <inkml:inkSource xml:id="inkSrc0">
-        <inkml:traceFormat>
-          <inkml:channel name="X" type="integer" min="-2.14748E9" max="2.14748E9" units="cm"/>
-          <inkml:channel name="Y" type="integer" min="-2.14748E9" max="2.14748E9" units="cm"/>
-          <inkml:channel name="F" type="integer" max="32767" units="dev"/>
-          <inkml:channel name="OA" type="integer" max="360" units="deg"/>
-          <inkml:channel name="OE" type="integer" max="90" units="deg"/>
-        </inkml:traceFormat>
-        <inkml:channelProperties>
-          <inkml:channelProperty channel="X" name="resolution" value="1000" units="1/cm"/>
-          <inkml:channelProperty channel="Y" name="resolution" value="1000" units="1/cm"/>
-          <inkml:channelProperty channel="F" name="resolution" value="0" units="1/dev"/>
-          <inkml:channelProperty channel="OA" name="resolution" value="1000" units="1/deg"/>
-          <inkml:channelProperty channel="OE" name="resolution" value="1000" units="1/deg"/>
-        </inkml:channelProperties>
-      </inkml:inkSource>
-      <inkml:timestamp xml:id="ts0" timeString="2025-10-02T06:30:36.981"/>
-    </inkml:context>
-    <inkml:brush xml:id="br0">
-      <inkml:brushProperty name="width" value="0.2" units="cm"/>
-      <inkml:brushProperty name="height" value="0.2" units="cm"/>
-    </inkml:brush>
-  </inkml:definitions>
-  <inkml:trace contextRef="#ctx0" brushRef="#br0">30 78 2772 0 0,'-30'-19'2604'0'0,"38"15"-2590"0"0,0 2-1 0 0,-1-1 1 0 0,1 1 0 0 0,0 0-1 0 0,0 0 1 0 0,14 0 0 0 0,565-35 46 0 0,2 32 7 0 0,-490 5-42 0 0,-75 4 37 0 0,-24-4-59 0 0,0 0-1 0 0,0 0 1 0 0,1 0 0 0 0,-1 0-1 0 0,0 0 1 0 0,0 0-1 0 0,0 0 1 0 0,0 1 0 0 0,1-1-1 0 0,-1 0 1 0 0,0 0 0 0 0,0 0-1 0 0,0 0 1 0 0,0 1 0 0 0,0-1-1 0 0,1 0 1 0 0,-1 0 0 0 0,0 0-1 0 0,0 0 1 0 0,0 1-1 0 0,0-1 1 0 0,0 0 0 0 0,0 0-1 0 0,0 0 1 0 0,0 1 0 0 0,0-1-1 0 0,0 0 1 0 0,0 0 0 0 0,0 0-1 0 0,0 1 1 0 0,0-1-1 0 0,0 0 1 0 0,0 0 0 0 0,0 0-1 0 0,0 1 1 0 0,0-1 0 0 0,0 0-1 0 0,0 0 1 0 0,0 0 0 0 0,0 1-1 0 0,-1-1 1 0 0,1 0 0 0 0,0 0-1 0 0,0 0 1 0 0,0 1-1 0 0,-3 1 8 0 0,1 0-1 0 0,-1 0 1 0 0,0 0-1 0 0,0 0 1 0 0,0-1-1 0 0,0 1 1 0 0,0-1-1 0 0,0 1 0 0 0,-4 0 1 0 0,-370 92 275 0 0,323-82-207 0 0,-448 104 472 0 0,576-113-498 0 0,268-13-336 0 0,-334 16-335 0 0,-31 8-3489 0 0</inkml:trace>
-</inkml:ink>
-</file>
-
-<file path=ppt/ink/ink14.xml><?xml version="1.0" encoding="utf-8"?>
-<inkml:ink xmlns:inkml="http://www.w3.org/2003/InkML">
-  <inkml:definitions>
-    <inkml:context xml:id="ctx0">
-      <inkml:inkSource xml:id="inkSrc0">
-        <inkml:traceFormat>
-          <inkml:channel name="X" type="integer" min="-2.14748E9" max="2.14748E9" units="cm"/>
-          <inkml:channel name="Y" type="integer" min="-2.14748E9" max="2.14748E9" units="cm"/>
-          <inkml:channel name="F" type="integer" max="32767" units="dev"/>
-        </inkml:traceFormat>
-        <inkml:channelProperties>
-          <inkml:channelProperty channel="X" name="resolution" value="1000" units="1/cm"/>
-          <inkml:channelProperty channel="Y" name="resolution" value="1000" units="1/cm"/>
-          <inkml:channelProperty channel="F" name="resolution" value="0" units="1/dev"/>
-        </inkml:channelProperties>
-      </inkml:inkSource>
-      <inkml:timestamp xml:id="ts0" timeString="2025-10-02T06:40:21.528"/>
-    </inkml:context>
-    <inkml:brush xml:id="br0">
-      <inkml:brushProperty name="width" value="0.2" units="cm"/>
-      <inkml:brushProperty name="height" value="0.2" units="cm"/>
-    </inkml:brush>
-  </inkml:definitions>
-  <inkml:trace contextRef="#ctx0" brushRef="#br0">1 1 24575</inkml:trace>
-</inkml:ink>
-</file>
-
 <file path=ppt/ink/ink15.xml><?xml version="1.0" encoding="utf-8"?>
-<inkml:ink xmlns:inkml="http://www.w3.org/2003/InkML">
-  <inkml:definitions>
-    <inkml:context xml:id="ctx0">
-      <inkml:inkSource xml:id="inkSrc0">
-        <inkml:traceFormat>
-          <inkml:channel name="X" type="integer" min="-2.14748E9" max="2.14748E9" units="cm"/>
-          <inkml:channel name="Y" type="integer" min="-2.14748E9" max="2.14748E9" units="cm"/>
-          <inkml:channel name="F" type="integer" max="32767" units="dev"/>
-          <inkml:channel name="OA" type="integer" max="360" units="deg"/>
-          <inkml:channel name="OE" type="integer" max="90" units="deg"/>
-        </inkml:traceFormat>
-        <inkml:channelProperties>
-          <inkml:channelProperty channel="X" name="resolution" value="1000" units="1/cm"/>
-          <inkml:channelProperty channel="Y" name="resolution" value="1000" units="1/cm"/>
-          <inkml:channelProperty channel="F" name="resolution" value="0" units="1/dev"/>
-          <inkml:channelProperty channel="OA" name="resolution" value="1000" units="1/deg"/>
-          <inkml:channelProperty channel="OE" name="resolution" value="1000" units="1/deg"/>
-        </inkml:channelProperties>
-      </inkml:inkSource>
-      <inkml:timestamp xml:id="ts0" timeString="2026-04-10T16:13:27.914"/>
-    </inkml:context>
-    <inkml:brush xml:id="br0">
-      <inkml:brushProperty name="width" value="0.2" units="cm"/>
-      <inkml:brushProperty name="height" value="0.2" units="cm"/>
-      <inkml:brushProperty name="color" value="#FFC114"/>
-    </inkml:brush>
-  </inkml:definitions>
-  <inkml:trace contextRef="#ctx0" brushRef="#br0">245 13 5837 0 0,'0'0'-550'0'0,"22"-7"-3971"0"0,30 5 4575 0 0,-49 2-43 0 0,17-1 25 0 0,12-1 31 0 0,-29 2 297 0 0,-12 0-357 0 0,-125 0 6 0 0,52 7-44 0 0,79-7 23 0 0,2 0-12 0 0,0 1 17 0 0,0-1 0 0 0,-1 0 0 0 0,1 0 0 0 0,0 0 0 0 0,0 1 0 0 0,0-1 0 0 0,0 0 1 0 0,0 1-1 0 0,0-1 0 0 0,0 1 0 0 0,0-1 0 0 0,0 1 0 0 0,0 0 0 0 0,0-1 0 0 0,0 1 1 0 0,0 0-1 0 0,0 0 0 0 0,0 0 0 0 0,1-1 0 0 0,-1 1 0 0 0,0 0 0 0 0,1 0 1 0 0,-1 0-1 0 0,0 2 0 0 0,-7 31 276 0 0,1 0-1 0 0,2 1 1 0 0,-2 55 0 0 0,35-93-8 0 0,40 3-212 0 0,-65 1-53 0 0,44 15-10 0 0,-36-11 9 0 0,-8-5-4 0 0,0 1 1 0 0,0 0 0 0 0,0 0-1 0 0,0 1 1 0 0,0-1 0 0 0,0 0-1 0 0,0 1 1 0 0,0 0 0 0 0,-1 0-1 0 0,1 0 1 0 0,-1 0 0 0 0,1 0-1 0 0,-1 0 1 0 0,0 0 0 0 0,0 1-1 0 0,0-1 1 0 0,0 1 0 0 0,0 0-1 0 0,-1 0 1 0 0,1-1 0 0 0,-1 1-1 0 0,1 0 1 0 0,-1 0 0 0 0,0 0-1 0 0,0 1 1 0 0,-1-1 0 0 0,1 0-1 0 0,0 4 1 0 0,-2-3 4 0 0,0 1 0 0 0,0-1-1 0 0,0 1 1 0 0,0-1 0 0 0,-1 0 0 0 0,1 0 0 0 0,-1 1 0 0 0,0-1 0 0 0,-1 0 0 0 0,1-1-1 0 0,-1 1 1 0 0,1 0 0 0 0,-7 5 0 0 0,-43 40 53 0 0,40-39-50 0 0,5-4 97 0 0,0-1 0 0 0,-1 0 0 0 0,0 0 0 0 0,0 0 0 0 0,0-1 0 0 0,0-1 0 0 0,-1 1 0 0 0,0-1 0 0 0,1-1 0 0 0,-18 4 0 0 0,24-6 63 0 0,-21 1 602 0 0,-9-1-152 0 0,29-1-365 0 0,-35-5-239 0 0,26 1-2345 0 0,10-1 1117 0 0</inkml:trace>
-</inkml:ink>
-</file>
-
-<file path=ppt/ink/ink16.xml><?xml version="1.0" encoding="utf-8"?>
-<inkml:ink xmlns:inkml="http://www.w3.org/2003/InkML">
-  <inkml:definitions>
-    <inkml:context xml:id="ctx0">
-      <inkml:inkSource xml:id="inkSrc0">
-        <inkml:traceFormat>
-          <inkml:channel name="X" type="integer" min="-2.14748E9" max="2.14748E9" units="cm"/>
-          <inkml:channel name="Y" type="integer" min="-2.14748E9" max="2.14748E9" units="cm"/>
-          <inkml:channel name="F" type="integer" max="32767" units="dev"/>
-          <inkml:channel name="OA" type="integer" max="360" units="deg"/>
-          <inkml:channel name="OE" type="integer" max="90" units="deg"/>
-        </inkml:traceFormat>
-        <inkml:channelProperties>
-          <inkml:channelProperty channel="X" name="resolution" value="1000" units="1/cm"/>
-          <inkml:channelProperty channel="Y" name="resolution" value="1000" units="1/cm"/>
-          <inkml:channelProperty channel="F" name="resolution" value="0" units="1/dev"/>
-          <inkml:channelProperty channel="OA" name="resolution" value="1000" units="1/deg"/>
-          <inkml:channelProperty channel="OE" name="resolution" value="1000" units="1/deg"/>
-        </inkml:channelProperties>
-      </inkml:inkSource>
-      <inkml:timestamp xml:id="ts0" timeString="2026-04-10T16:13:31.052"/>
-    </inkml:context>
-    <inkml:brush xml:id="br0">
-      <inkml:brushProperty name="width" value="0.2" units="cm"/>
-      <inkml:brushProperty name="height" value="0.2" units="cm"/>
-      <inkml:brushProperty name="color" value="#FFC114"/>
-    </inkml:brush>
-  </inkml:definitions>
-  <inkml:trace contextRef="#ctx0" brushRef="#br0">89 0 3716 0 0,'0'0'-334'0'0,"11"3"-1078"0"0,-11-3 1432 0 0,0 0 0 0 0,0 0 0 0 0,0 0 0 0 0,0 0 0 0 0,-20 10-20 0 0,15-8 0 0 0,-29 26-38 0 0,22-1 8 0 0,-10 16-27 0 0,22-42 56 0 0,-1 1 0 0 0,0-1 0 0 0,0 1 1 0 0,1 0-1 0 0,-1-1 0 0 0,1 1 0 0 0,0 0 1 0 0,-1-1-1 0 0,1 1 0 0 0,0 0 0 0 0,0-1 0 0 0,0 1 1 0 0,0 2-1 0 0,-1 12 28 0 0,1-14-18 0 0,3 22-6 0 0,-1-10 14 0 0,-2-13-17 0 0,7 29 20 0 0,-2-17-30 0 0,-1-3 19 0 0,0 0 0 0 0,0-1 0 0 0,1 1 0 0 0,6 8 1 0 0,22 15 30 0 0,-31-32-47 0 0,27 19 83 0 0,32-6 20 0 0,-58-14-82 0 0,52 2 269 0 0,0-13-15 0 0,-53 10-258 0 0,43-15 81 0 0,-43 15-79 0 0,40-20 259 0 0,-40 20-51 0 0,27-27 716 0 0,-28 26-798 0 0,21-44 1239 0 0,-12 10-1095 0 0,-9 34-224 0 0,-2-31 562 0 0,-1 16-490 0 0,2 15-48 0 0,0 0-29 0 0,0 0 1 0 0,0 1-1 0 0,-1-1 0 0 0,1 0 0 0 0,0 0 0 0 0,-1 0 0 0 0,1 0 0 0 0,-1 0 0 0 0,0 0 0 0 0,0 0 0 0 0,0 1 1 0 0,0-1-1 0 0,-2-2 0 0 0,-40-26 244 0 0,41 29-292 0 0,-46-19-1 0 0,35 15-14 0 0,1 0-1 0 0,-1 1 0 0 0,0 1 0 0 0,0 0 0 0 0,-19-1 0 0 0,28 4 8 0 0,2-1-23 0 0,-7 0 10 0 0,6 0 12 0 0,-1 2 2 0 0,-30-1-6 0 0,31-1 18 0 0,0 1-14 0 0,-10 0 4 0 0,10 0-7 0 0,-12 2-330 0 0</inkml:trace>
-</inkml:ink>
-</file>
-
-<file path=ppt/ink/ink17.xml><?xml version="1.0" encoding="utf-8"?>
-<inkml:ink xmlns:inkml="http://www.w3.org/2003/InkML">
-  <inkml:definitions>
-    <inkml:context xml:id="ctx0">
-      <inkml:inkSource xml:id="inkSrc0">
-        <inkml:traceFormat>
-          <inkml:channel name="X" type="integer" min="-2.14748E9" max="2.14748E9" units="cm"/>
-          <inkml:channel name="Y" type="integer" min="-2.14748E9" max="2.14748E9" units="cm"/>
-          <inkml:channel name="F" type="integer" max="32767" units="dev"/>
-          <inkml:channel name="OA" type="integer" max="360" units="deg"/>
-          <inkml:channel name="OE" type="integer" max="90" units="deg"/>
-        </inkml:traceFormat>
-        <inkml:channelProperties>
-          <inkml:channelProperty channel="X" name="resolution" value="1000" units="1/cm"/>
-          <inkml:channelProperty channel="Y" name="resolution" value="1000" units="1/cm"/>
-          <inkml:channelProperty channel="F" name="resolution" value="0" units="1/dev"/>
-          <inkml:channelProperty channel="OA" name="resolution" value="1000" units="1/deg"/>
-          <inkml:channelProperty channel="OE" name="resolution" value="1000" units="1/deg"/>
-        </inkml:channelProperties>
-      </inkml:inkSource>
-      <inkml:timestamp xml:id="ts0" timeString="2026-04-10T16:13:32.380"/>
-    </inkml:context>
-    <inkml:brush xml:id="br0">
-      <inkml:brushProperty name="width" value="0.2" units="cm"/>
-      <inkml:brushProperty name="height" value="0.2" units="cm"/>
-      <inkml:brushProperty name="color" value="#FFC114"/>
-    </inkml:brush>
-  </inkml:definitions>
-  <inkml:trace contextRef="#ctx0" brushRef="#br0">149 7 4652 0 0,'0'0'-354'0'0,"3"-5"-252"0"0,-2 4 358 0 0,-13 24-1329 0 0,12-22 1554 0 0,0-1 38 0 0,-1 0 0 0 0,1 1 0 0 0,0-1 0 0 0,0 0 0 0 0,0 1 0 0 0,1-1 0 0 0,-1 0 0 0 0,0 1 0 0 0,0-1 0 0 0,0 1 0 0 0,0-1 0 0 0,0 0 0 0 0,0 1 0 0 0,0-1 0 0 0,1 0 0 0 0,-1 1 0 0 0,0-1 0 0 0,0 0 0 0 0,0 0 0 0 0,1 1 0 0 0,-1-1 0 0 0,0 0 0 0 0,1 0 0 0 0,-1 1 0 0 0,0-1 0 0 0,0 0 0 0 0,1 0 0 0 0,-1 0 0 0 0,0 1 0 0 0,1-1 0 0 0,-1 0 0 0 0,0 0 0 0 0,1 0 0 0 0,-1 0 0 0 0,0 0-1 0 0,1 0 1 0 0,-1 0 0 0 0,1 0 0 0 0,-1 0 0 0 0,0 0 0 0 0,1 0 0 0 0,-1 0 0 0 0,0 0 0 0 0,1 0 0 0 0,18-10 465 0 0,-41 20 558 0 0,-38 16-330 0 0,58-25-698 0 0,2-1-14 0 0,-1 0 0 0 0,1 0 1 0 0,0 0-1 0 0,0 0 0 0 0,-1 0 1 0 0,1 0-1 0 0,0 0 0 0 0,0 0 0 0 0,-1 0 1 0 0,1-1-1 0 0,0 1 0 0 0,0 0 1 0 0,0 0-1 0 0,-1 0 0 0 0,1 0 1 0 0,0-1-1 0 0,0 1 0 0 0,0 0 0 0 0,0 0 1 0 0,-1 0-1 0 0,1-1 0 0 0,0 1 1 0 0,0 0-1 0 0,0 0 0 0 0,0 0 0 0 0,0-1 1 0 0,0 1-1 0 0,0 0 0 0 0,0 0 1 0 0,0-1-1 0 0,0 1 0 0 0,0 0 1 0 0,0 0-1 0 0,0-1 0 0 0,0 1 0 0 0,0 0 1 0 0,0 0-1 0 0,0-1 0 0 0,0 1 1 0 0,0 0-1 0 0,0 0 0 0 0,0-1 1 0 0,0 1-1 0 0,0 0 0 0 0,0 0 0 0 0,1-1 1 0 0,12-18 67 0 0,-11 18-8 0 0,-12 2-382 0 0,0 0 1 0 0,1 1-1 0 0,-1 1 1 0 0,1 0-1 0 0,0 0 0 0 0,-17 8 1 0 0,13-3-240 0 0</inkml:trace>
-</inkml:ink>
-</file>
-
-<file path=ppt/ink/ink18.xml><?xml version="1.0" encoding="utf-8"?>
 <inkml:ink xmlns:inkml="http://www.w3.org/2003/InkML">
   <inkml:definitions>
     <inkml:context xml:id="ctx0">
@@ -638,7 +547,7 @@
 </inkml:ink>
 </file>
 
-<file path=ppt/ink/ink19.xml><?xml version="1.0" encoding="utf-8"?>
+<file path=ppt/ink/ink16.xml><?xml version="1.0" encoding="utf-8"?>
 <inkml:ink xmlns:inkml="http://www.w3.org/2003/InkML">
   <inkml:definitions>
     <inkml:context xml:id="ctx0">
@@ -670,7 +579,130 @@
 </inkml:ink>
 </file>
 
+<file path=ppt/ink/ink17.xml><?xml version="1.0" encoding="utf-8"?>
+<inkml:ink xmlns:inkml="http://www.w3.org/2003/InkML">
+  <inkml:definitions>
+    <inkml:context xml:id="ctx0">
+      <inkml:inkSource xml:id="inkSrc0">
+        <inkml:traceFormat>
+          <inkml:channel name="X" type="integer" min="-2.14748E9" max="2.14748E9" units="cm"/>
+          <inkml:channel name="Y" type="integer" min="-2.14748E9" max="2.14748E9" units="cm"/>
+          <inkml:channel name="F" type="integer" max="32767" units="dev"/>
+          <inkml:channel name="OA" type="integer" max="360" units="deg"/>
+          <inkml:channel name="OE" type="integer" max="90" units="deg"/>
+        </inkml:traceFormat>
+        <inkml:channelProperties>
+          <inkml:channelProperty channel="X" name="resolution" value="1000" units="1/cm"/>
+          <inkml:channelProperty channel="Y" name="resolution" value="1000" units="1/cm"/>
+          <inkml:channelProperty channel="F" name="resolution" value="0" units="1/dev"/>
+          <inkml:channelProperty channel="OA" name="resolution" value="1000" units="1/deg"/>
+          <inkml:channelProperty channel="OE" name="resolution" value="1000" units="1/deg"/>
+        </inkml:channelProperties>
+      </inkml:inkSource>
+      <inkml:timestamp xml:id="ts0" timeString="2026-04-10T16:17:54.926"/>
+    </inkml:context>
+    <inkml:brush xml:id="br0">
+      <inkml:brushProperty name="width" value="0.2" units="cm"/>
+      <inkml:brushProperty name="height" value="0.2" units="cm"/>
+      <inkml:brushProperty name="color" value="#FFC114"/>
+    </inkml:brush>
+  </inkml:definitions>
+  <inkml:trace contextRef="#ctx0" brushRef="#br0">112 0 4980 0 0,'0'0'-390'0'0,"-16"15"-1966"0"0,6 3 2334 0 0,0 0 0 0 0,2 1 1 0 0,0 0-1 0 0,1 1 1 0 0,1 0-1 0 0,1 0 1 0 0,-3 25-1 0 0,-12 40 32 0 0,17-77 1 0 0,0 1 0 0 0,1-1 0 0 0,0 1 1 0 0,1 0-1 0 0,-1 0 0 0 0,2-1 0 0 0,-1 1 0 0 0,1 0 1 0 0,1 0-1 0 0,-1 0 0 0 0,2 0 0 0 0,-1 0 0 0 0,1-1 0 0 0,0 1 1 0 0,1-1-1 0 0,0 1 0 0 0,0-1 0 0 0,1 0 0 0 0,0 0 1 0 0,1-1-1 0 0,-1 1 0 0 0,2-1 0 0 0,-1 0 0 0 0,1 0 0 0 0,0 0 1 0 0,0-1-1 0 0,1 0 0 0 0,-1 0 0 0 0,1-1 0 0 0,11 7 1 0 0,-7-6 21 0 0,-1-1 0 0 0,1 0 0 0 0,0-1 0 0 0,0 0 0 0 0,0-1 0 0 0,0 0 0 0 0,1-1 0 0 0,-1 0 0 0 0,21 1 0 0 0,-28-3 48 0 0,32-22 844 0 0,-33 17-864 0 0,0 0 1 0 0,0 0 0 0 0,0-1 0 0 0,-1 1-1 0 0,0-1 1 0 0,0 0 0 0 0,-1 1 0 0 0,0-1-1 0 0,0 0 1 0 0,0 0 0 0 0,0 0 0 0 0,-1 0-1 0 0,0 0 1 0 0,-1-8 0 0 0,1-24 123 0 0,1 34-155 0 0,-1 0 1 0 0,1 0-1 0 0,-1 0 1 0 0,0 0 0 0 0,0 0-1 0 0,-1 0 1 0 0,0-7-1 0 0,0 10 11 0 0,1-2 12 0 0,0 0 0 0 0,0 0 0 0 0,0 0 0 0 0,-1-1 0 0 0,1 1 0 0 0,-1 0-1 0 0,0 0 1 0 0,0 0 0 0 0,0 0 0 0 0,0 0 0 0 0,-1 0 0 0 0,1 1 0 0 0,-1-1-1 0 0,-2-3 1 0 0,3 5-4 0 0,-19-23 542 0 0,16 22-568 0 0,0 0 0 0 0,0-1 0 0 0,0 1 0 0 0,0 0 0 0 0,-1 1 0 0 0,1-1 0 0 0,-1 1 0 0 0,1 0 0 0 0,-1 0 0 0 0,1 1 0 0 0,-1-1 0 0 0,-8 1 0 0 0,10 0-9 0 0,-17-2-21 0 0,5 3 15 0 0,12 0-5 0 0,-13 2-44 0 0,12-2-215 0 0,-8 1 647 0 0</inkml:trace>
+</inkml:ink>
+</file>
+
+<file path=ppt/ink/ink18.xml><?xml version="1.0" encoding="utf-8"?>
+<inkml:ink xmlns:inkml="http://www.w3.org/2003/InkML">
+  <inkml:definitions>
+    <inkml:context xml:id="ctx0">
+      <inkml:inkSource xml:id="inkSrc0">
+        <inkml:traceFormat>
+          <inkml:channel name="X" type="integer" min="-2.14748E9" max="2.14748E9" units="cm"/>
+          <inkml:channel name="Y" type="integer" min="-2.14748E9" max="2.14748E9" units="cm"/>
+          <inkml:channel name="F" type="integer" max="32767" units="dev"/>
+          <inkml:channel name="OA" type="integer" max="360" units="deg"/>
+          <inkml:channel name="OE" type="integer" max="90" units="deg"/>
+        </inkml:traceFormat>
+        <inkml:channelProperties>
+          <inkml:channelProperty channel="X" name="resolution" value="1000" units="1/cm"/>
+          <inkml:channelProperty channel="Y" name="resolution" value="1000" units="1/cm"/>
+          <inkml:channelProperty channel="F" name="resolution" value="0" units="1/dev"/>
+          <inkml:channelProperty channel="OA" name="resolution" value="1000" units="1/deg"/>
+          <inkml:channelProperty channel="OE" name="resolution" value="1000" units="1/deg"/>
+        </inkml:channelProperties>
+      </inkml:inkSource>
+      <inkml:timestamp xml:id="ts0" timeString="2026-04-10T16:17:40.860"/>
+    </inkml:context>
+    <inkml:brush xml:id="br0">
+      <inkml:brushProperty name="width" value="0.2" units="cm"/>
+      <inkml:brushProperty name="height" value="0.2" units="cm"/>
+      <inkml:brushProperty name="color" value="#FFC114"/>
+    </inkml:brush>
+  </inkml:definitions>
+  <inkml:trace contextRef="#ctx0" brushRef="#br0">273 7 304 0 0,'0'0'2179'0'0,"13"-4"-2122"0"0,10 8-23 0 0,0-6 21 0 0,67-1 44 0 0,-88 3-81 0 0,56-2 164 0 0,-215 31 1642 0 0,105-18-1818 0 0,13-3 1 0 0,-54 18-1 0 0,19-2-69 0 0,72-23 55 0 0,-20 8 10 0 0,32 51-61 0 0,-6-47 60 0 0,-2 1 0 0 0,1-1 0 0 0,0 18-1 0 0,-3-30 8 0 0,0 0-1 0 0,0-1 0 0 0,0 1 0 0 0,0-1 0 0 0,0 1 0 0 0,0-1 0 0 0,1 1 0 0 0,-1-1 1 0 0,0 1-1 0 0,0-1 0 0 0,0 1 0 0 0,1-1 0 0 0,-1 1 0 0 0,0-1 0 0 0,1 1 0 0 0,-1-1 0 0 0,0 1 1 0 0,1-1-1 0 0,-1 1 0 0 0,1-1 0 0 0,-1 0 0 0 0,1 1 0 0 0,-1-1 0 0 0,0 0 0 0 0,1 0 1 0 0,-1 1-1 0 0,1-1 0 0 0,0 0 0 0 0,-1 0 0 0 0,1 0 0 0 0,-1 1 0 0 0,1-1 0 0 0,-1 0 1 0 0,1 0-1 0 0,-1 0 0 0 0,1 0 0 0 0,0 0 0 0 0,-1 0 0 0 0,1 0 0 0 0,-1 0 0 0 0,1-1 1 0 0,-1 1-1 0 0,1 0 0 0 0,0 0 0 0 0,32-11 146 0 0,-23 7-167 0 0,2-2 58 0 0,30-5-20 0 0,21 1-5 0 0,-60 10-24 0 0,22 0 18 0 0,5 0-20 0 0,-25-1 2 0 0,-1 1 0 0 0,1 0 0 0 0,0 0 0 0 0,-1 0 0 0 0,1 0 0 0 0,-1 1 0 0 0,1 0 0 0 0,0 0 0 0 0,-1 0 0 0 0,0 1 0 0 0,7 2 0 0 0,-9-3 8 0 0,-1-1-1 0 0,0 0-1 0 0,1 0 1 0 0,-1 0-1 0 0,0 0 1 0 0,1 0-1 0 0,-1 0 1 0 0,0 0 0 0 0,1 1-1 0 0,-1-1 1 0 0,0 1-1 0 0,0-1 1 0 0,1 1-1 0 0,-1-1 1 0 0,0 1-1 0 0,0 0 1 0 0,0-1-1 0 0,0 1 1 0 0,0 0 0 0 0,0 0-1 0 0,1 1 1 0 0,26 19-11 0 0,-24-17 16 0 0,0 0 0 0 0,0 0 1 0 0,0 0-1 0 0,0 1 0 0 0,-1-1 0 0 0,0 1 0 0 0,0 0 0 0 0,0 0 1 0 0,0 0-1 0 0,-1 1 0 0 0,0-1 0 0 0,0 0 0 0 0,0 1 0 0 0,-1-1 1 0 0,0 1-1 0 0,0 0 0 0 0,0 0 0 0 0,-1 5 0 0 0,0-3 18 0 0,-2-1 0 0 0,1 1-1 0 0,-1-1 1 0 0,0 0 0 0 0,0 0 0 0 0,-1 0-1 0 0,0 0 1 0 0,0 0 0 0 0,-1 0 0 0 0,1-1-1 0 0,-1 0 1 0 0,-1 0 0 0 0,0 0 0 0 0,1 0-1 0 0,-2-1 1 0 0,1 1 0 0 0,-1-1 0 0 0,1-1 0 0 0,-11 7-1 0 0,-1 1 107 0 0,1-2 0 0 0,-2 0 0 0 0,1-2 0 0 0,-1 0-1 0 0,-1 0 1 0 0,-25 6 0 0 0,37-12-31 0 0,-1-1 1 0 0,0 1-1 0 0,0-1 0 0 0,0-1 1 0 0,-1 0-1 0 0,1 0 0 0 0,0 0 1 0 0,0-1-1 0 0,0 0 1 0 0,0-1-1 0 0,0 0 0 0 0,1 0 1 0 0,-1 0-1 0 0,0-1 0 0 0,1 0 1 0 0,0-1-1 0 0,0 0 0 0 0,0 0 1 0 0,0 0-1 0 0,-7-7 0 0 0,8 5-21 0 0,0 0-1 0 0,0 0 0 0 0,1-1 1 0 0,0 1-1 0 0,-7-13 1 0 0,11 18-16 0 0,-24-11 479 0 0</inkml:trace>
+</inkml:ink>
+</file>
+
 <file path=ppt/ink/ink2.xml><?xml version="1.0" encoding="utf-8"?>
+<inkml:ink xmlns:inkml="http://www.w3.org/2003/InkML">
+  <inkml:definitions>
+    <inkml:context xml:id="ctx0">
+      <inkml:inkSource xml:id="inkSrc0">
+        <inkml:traceFormat>
+          <inkml:channel name="X" type="integer" min="-2.14748E9" max="2.14748E9" units="cm"/>
+          <inkml:channel name="Y" type="integer" min="-2.14748E9" max="2.14748E9" units="cm"/>
+          <inkml:channel name="F" type="integer" max="32767" units="dev"/>
+        </inkml:traceFormat>
+        <inkml:channelProperties>
+          <inkml:channelProperty channel="X" name="resolution" value="1000" units="1/cm"/>
+          <inkml:channelProperty channel="Y" name="resolution" value="1000" units="1/cm"/>
+          <inkml:channelProperty channel="F" name="resolution" value="0" units="1/dev"/>
+        </inkml:channelProperties>
+      </inkml:inkSource>
+      <inkml:timestamp xml:id="ts0" timeString="2025-10-02T06:40:21.528"/>
+    </inkml:context>
+    <inkml:brush xml:id="br0">
+      <inkml:brushProperty name="width" value="0.2" units="cm"/>
+      <inkml:brushProperty name="height" value="0.2" units="cm"/>
+    </inkml:brush>
+  </inkml:definitions>
+  <inkml:trace contextRef="#ctx0" brushRef="#br0">1 1 24575</inkml:trace>
+</inkml:ink>
+</file>
+
+<file path=ppt/ink/ink3.xml><?xml version="1.0" encoding="utf-8"?>
+<inkml:ink xmlns:inkml="http://www.w3.org/2003/InkML">
+  <inkml:definitions>
+    <inkml:context xml:id="ctx0">
+      <inkml:inkSource xml:id="inkSrc0">
+        <inkml:traceFormat>
+          <inkml:channel name="X" type="integer" min="-2.14748E9" max="2.14748E9" units="cm"/>
+          <inkml:channel name="Y" type="integer" min="-2.14748E9" max="2.14748E9" units="cm"/>
+          <inkml:channel name="F" type="integer" max="32767" units="dev"/>
+          <inkml:channel name="OA" type="integer" max="360" units="deg"/>
+          <inkml:channel name="OE" type="integer" max="90" units="deg"/>
+        </inkml:traceFormat>
+        <inkml:channelProperties>
+          <inkml:channelProperty channel="X" name="resolution" value="1000" units="1/cm"/>
+          <inkml:channelProperty channel="Y" name="resolution" value="1000" units="1/cm"/>
+          <inkml:channelProperty channel="F" name="resolution" value="0" units="1/dev"/>
+          <inkml:channelProperty channel="OA" name="resolution" value="1000" units="1/deg"/>
+          <inkml:channelProperty channel="OE" name="resolution" value="1000" units="1/deg"/>
+        </inkml:channelProperties>
+      </inkml:inkSource>
+      <inkml:timestamp xml:id="ts0" timeString="2026-04-12T05:28:35.738"/>
+    </inkml:context>
+    <inkml:brush xml:id="br0">
+      <inkml:brushProperty name="width" value="0.2" units="cm"/>
+      <inkml:brushProperty name="height" value="0.2" units="cm"/>
+      <inkml:brushProperty name="color" value="#FF0066"/>
+    </inkml:brush>
+  </inkml:definitions>
+  <inkml:trace contextRef="#ctx0" brushRef="#br0">60 38 5665 0 0,'-55'-36'-433'0'0,"53"35"752"0"0,-1 10-363 0 0,8 21 19 0 0,44 200 82 0 0,-37-181 152 0 0,-3 2 0 0 0,6 98 0 0 0,-12-135 64 0 0,3-47-4856 0 0</inkml:trace>
+</inkml:ink>
+</file>
+
+<file path=ppt/ink/ink4.xml><?xml version="1.0" encoding="utf-8"?>
 <inkml:ink xmlns:inkml="http://www.w3.org/2003/InkML">
   <inkml:definitions>
     <inkml:context xml:id="ctx0">
@@ -702,71 +734,7 @@
 </inkml:ink>
 </file>
 
-<file path=ppt/ink/ink20.xml><?xml version="1.0" encoding="utf-8"?>
-<inkml:ink xmlns:inkml="http://www.w3.org/2003/InkML">
-  <inkml:definitions>
-    <inkml:context xml:id="ctx0">
-      <inkml:inkSource xml:id="inkSrc0">
-        <inkml:traceFormat>
-          <inkml:channel name="X" type="integer" min="-2.14748E9" max="2.14748E9" units="cm"/>
-          <inkml:channel name="Y" type="integer" min="-2.14748E9" max="2.14748E9" units="cm"/>
-          <inkml:channel name="F" type="integer" max="32767" units="dev"/>
-          <inkml:channel name="OA" type="integer" max="360" units="deg"/>
-          <inkml:channel name="OE" type="integer" max="90" units="deg"/>
-        </inkml:traceFormat>
-        <inkml:channelProperties>
-          <inkml:channelProperty channel="X" name="resolution" value="1000" units="1/cm"/>
-          <inkml:channelProperty channel="Y" name="resolution" value="1000" units="1/cm"/>
-          <inkml:channelProperty channel="F" name="resolution" value="0" units="1/dev"/>
-          <inkml:channelProperty channel="OA" name="resolution" value="1000" units="1/deg"/>
-          <inkml:channelProperty channel="OE" name="resolution" value="1000" units="1/deg"/>
-        </inkml:channelProperties>
-      </inkml:inkSource>
-      <inkml:timestamp xml:id="ts0" timeString="2026-04-10T16:17:54.926"/>
-    </inkml:context>
-    <inkml:brush xml:id="br0">
-      <inkml:brushProperty name="width" value="0.2" units="cm"/>
-      <inkml:brushProperty name="height" value="0.2" units="cm"/>
-      <inkml:brushProperty name="color" value="#FFC114"/>
-    </inkml:brush>
-  </inkml:definitions>
-  <inkml:trace contextRef="#ctx0" brushRef="#br0">112 0 4980 0 0,'0'0'-390'0'0,"-16"15"-1966"0"0,6 3 2334 0 0,0 0 0 0 0,2 1 1 0 0,0 0-1 0 0,1 1 1 0 0,1 0-1 0 0,1 0 1 0 0,-3 25-1 0 0,-12 40 32 0 0,17-77 1 0 0,0 1 0 0 0,1-1 0 0 0,0 1 1 0 0,1 0-1 0 0,-1 0 0 0 0,2-1 0 0 0,-1 1 0 0 0,1 0 1 0 0,1 0-1 0 0,-1 0 0 0 0,2 0 0 0 0,-1 0 0 0 0,1-1 0 0 0,0 1 1 0 0,1-1-1 0 0,0 1 0 0 0,0-1 0 0 0,1 0 0 0 0,0 0 1 0 0,1-1-1 0 0,-1 1 0 0 0,2-1 0 0 0,-1 0 0 0 0,1 0 0 0 0,0 0 1 0 0,0-1-1 0 0,1 0 0 0 0,-1 0 0 0 0,1-1 0 0 0,11 7 1 0 0,-7-6 21 0 0,-1-1 0 0 0,1 0 0 0 0,0-1 0 0 0,0 0 0 0 0,0-1 0 0 0,0 0 0 0 0,1-1 0 0 0,-1 0 0 0 0,21 1 0 0 0,-28-3 48 0 0,32-22 844 0 0,-33 17-864 0 0,0 0 1 0 0,0 0 0 0 0,0-1 0 0 0,-1 1-1 0 0,0-1 1 0 0,0 0 0 0 0,-1 1 0 0 0,0-1-1 0 0,0 0 1 0 0,0 0 0 0 0,0 0 0 0 0,-1 0-1 0 0,0 0 1 0 0,-1-8 0 0 0,1-24 123 0 0,1 34-155 0 0,-1 0 1 0 0,1 0-1 0 0,-1 0 1 0 0,0 0 0 0 0,0 0-1 0 0,-1 0 1 0 0,0-7-1 0 0,0 10 11 0 0,1-2 12 0 0,0 0 0 0 0,0 0 0 0 0,0 0 0 0 0,-1-1 0 0 0,1 1 0 0 0,-1 0-1 0 0,0 0 1 0 0,0 0 0 0 0,0 0 0 0 0,0 0 0 0 0,-1 0 0 0 0,1 1 0 0 0,-1-1-1 0 0,-2-3 1 0 0,3 5-4 0 0,-19-23 542 0 0,16 22-568 0 0,0 0 0 0 0,0-1 0 0 0,0 1 0 0 0,0 0 0 0 0,-1 1 0 0 0,1-1 0 0 0,-1 1 0 0 0,1 0 0 0 0,-1 0 0 0 0,1 1 0 0 0,-1-1 0 0 0,-8 1 0 0 0,10 0-9 0 0,-17-2-21 0 0,5 3 15 0 0,12 0-5 0 0,-13 2-44 0 0,12-2-215 0 0,-8 1 647 0 0</inkml:trace>
-</inkml:ink>
-</file>
-
-<file path=ppt/ink/ink21.xml><?xml version="1.0" encoding="utf-8"?>
-<inkml:ink xmlns:inkml="http://www.w3.org/2003/InkML">
-  <inkml:definitions>
-    <inkml:context xml:id="ctx0">
-      <inkml:inkSource xml:id="inkSrc0">
-        <inkml:traceFormat>
-          <inkml:channel name="X" type="integer" min="-2.14748E9" max="2.14748E9" units="cm"/>
-          <inkml:channel name="Y" type="integer" min="-2.14748E9" max="2.14748E9" units="cm"/>
-          <inkml:channel name="F" type="integer" max="32767" units="dev"/>
-          <inkml:channel name="OA" type="integer" max="360" units="deg"/>
-          <inkml:channel name="OE" type="integer" max="90" units="deg"/>
-        </inkml:traceFormat>
-        <inkml:channelProperties>
-          <inkml:channelProperty channel="X" name="resolution" value="1000" units="1/cm"/>
-          <inkml:channelProperty channel="Y" name="resolution" value="1000" units="1/cm"/>
-          <inkml:channelProperty channel="F" name="resolution" value="0" units="1/dev"/>
-          <inkml:channelProperty channel="OA" name="resolution" value="1000" units="1/deg"/>
-          <inkml:channelProperty channel="OE" name="resolution" value="1000" units="1/deg"/>
-        </inkml:channelProperties>
-      </inkml:inkSource>
-      <inkml:timestamp xml:id="ts0" timeString="2026-04-10T16:17:40.860"/>
-    </inkml:context>
-    <inkml:brush xml:id="br0">
-      <inkml:brushProperty name="width" value="0.2" units="cm"/>
-      <inkml:brushProperty name="height" value="0.2" units="cm"/>
-      <inkml:brushProperty name="color" value="#FFC114"/>
-    </inkml:brush>
-  </inkml:definitions>
-  <inkml:trace contextRef="#ctx0" brushRef="#br0">273 7 304 0 0,'0'0'2179'0'0,"13"-4"-2122"0"0,10 8-23 0 0,0-6 21 0 0,67-1 44 0 0,-88 3-81 0 0,56-2 164 0 0,-215 31 1642 0 0,105-18-1818 0 0,13-3 1 0 0,-54 18-1 0 0,19-2-69 0 0,72-23 55 0 0,-20 8 10 0 0,32 51-61 0 0,-6-47 60 0 0,-2 1 0 0 0,1-1 0 0 0,0 18-1 0 0,-3-30 8 0 0,0 0-1 0 0,0-1 0 0 0,0 1 0 0 0,0-1 0 0 0,0 1 0 0 0,0-1 0 0 0,1 1 0 0 0,-1-1 1 0 0,0 1-1 0 0,0-1 0 0 0,0 1 0 0 0,1-1 0 0 0,-1 1 0 0 0,0-1 0 0 0,1 1 0 0 0,-1-1 0 0 0,0 1 1 0 0,1-1-1 0 0,-1 1 0 0 0,1-1 0 0 0,-1 0 0 0 0,1 1 0 0 0,-1-1 0 0 0,0 0 0 0 0,1 0 1 0 0,-1 1-1 0 0,1-1 0 0 0,0 0 0 0 0,-1 0 0 0 0,1 0 0 0 0,-1 1 0 0 0,1-1 0 0 0,-1 0 1 0 0,1 0-1 0 0,-1 0 0 0 0,1 0 0 0 0,0 0 0 0 0,-1 0 0 0 0,1 0 0 0 0,-1 0 0 0 0,1-1 1 0 0,-1 1-1 0 0,1 0 0 0 0,0 0 0 0 0,32-11 146 0 0,-23 7-167 0 0,2-2 58 0 0,30-5-20 0 0,21 1-5 0 0,-60 10-24 0 0,22 0 18 0 0,5 0-20 0 0,-25-1 2 0 0,-1 1 0 0 0,1 0 0 0 0,0 0 0 0 0,-1 0 0 0 0,1 0 0 0 0,-1 1 0 0 0,1 0 0 0 0,0 0 0 0 0,-1 0 0 0 0,0 1 0 0 0,7 2 0 0 0,-9-3 8 0 0,-1-1-1 0 0,0 0-1 0 0,1 0 1 0 0,-1 0-1 0 0,0 0 1 0 0,1 0-1 0 0,-1 0 1 0 0,0 0 0 0 0,1 1-1 0 0,-1-1 1 0 0,0 1-1 0 0,0-1 1 0 0,1 1-1 0 0,-1-1 1 0 0,0 1-1 0 0,0 0 1 0 0,0-1-1 0 0,0 1 1 0 0,0 0 0 0 0,0 0-1 0 0,1 1 1 0 0,26 19-11 0 0,-24-17 16 0 0,0 0 0 0 0,0 0 1 0 0,0 0-1 0 0,0 1 0 0 0,-1-1 0 0 0,0 1 0 0 0,0 0 0 0 0,0 0 1 0 0,0 0-1 0 0,-1 1 0 0 0,0-1 0 0 0,0 0 0 0 0,0 1 0 0 0,-1-1 1 0 0,0 1-1 0 0,0 0 0 0 0,0 0 0 0 0,-1 5 0 0 0,0-3 18 0 0,-2-1 0 0 0,1 1-1 0 0,-1-1 1 0 0,0 0 0 0 0,0 0 0 0 0,-1 0-1 0 0,0 0 1 0 0,0 0 0 0 0,-1 0 0 0 0,1-1-1 0 0,-1 0 1 0 0,-1 0 0 0 0,0 0 0 0 0,1 0-1 0 0,-2-1 1 0 0,1 1 0 0 0,-1-1 0 0 0,1-1 0 0 0,-11 7-1 0 0,-1 1 107 0 0,1-2 0 0 0,-2 0 0 0 0,1-2 0 0 0,-1 0-1 0 0,-1 0 1 0 0,-25 6 0 0 0,37-12-31 0 0,-1-1 1 0 0,0 1-1 0 0,0-1 0 0 0,0-1 1 0 0,-1 0-1 0 0,1 0 0 0 0,0 0 1 0 0,0-1-1 0 0,0 0 1 0 0,0-1-1 0 0,0 0 0 0 0,1 0 1 0 0,-1 0-1 0 0,0-1 0 0 0,1 0 1 0 0,0-1-1 0 0,0 0 0 0 0,0 0 1 0 0,0 0-1 0 0,-7-7 0 0 0,8 5-21 0 0,0 0-1 0 0,0 0 0 0 0,1-1 1 0 0,0 1-1 0 0,-7-13 1 0 0,11 18-16 0 0,-24-11 479 0 0</inkml:trace>
-</inkml:ink>
-</file>
-
-<file path=ppt/ink/ink3.xml><?xml version="1.0" encoding="utf-8"?>
+<file path=ppt/ink/ink5.xml><?xml version="1.0" encoding="utf-8"?>
 <inkml:ink xmlns:inkml="http://www.w3.org/2003/InkML">
   <inkml:definitions>
     <inkml:context xml:id="ctx0">
@@ -798,7 +766,7 @@
 </inkml:ink>
 </file>
 
-<file path=ppt/ink/ink4.xml><?xml version="1.0" encoding="utf-8"?>
+<file path=ppt/ink/ink6.xml><?xml version="1.0" encoding="utf-8"?>
 <inkml:ink xmlns:inkml="http://www.w3.org/2003/InkML">
   <inkml:definitions>
     <inkml:context xml:id="ctx0">
@@ -830,7 +798,7 @@
 </inkml:ink>
 </file>
 
-<file path=ppt/ink/ink5.xml><?xml version="1.0" encoding="utf-8"?>
+<file path=ppt/ink/ink7.xml><?xml version="1.0" encoding="utf-8"?>
 <inkml:ink xmlns:inkml="http://www.w3.org/2003/InkML">
   <inkml:definitions>
     <inkml:context xml:id="ctx0">
@@ -862,7 +830,7 @@
 </inkml:ink>
 </file>
 
-<file path=ppt/ink/ink6.xml><?xml version="1.0" encoding="utf-8"?>
+<file path=ppt/ink/ink8.xml><?xml version="1.0" encoding="utf-8"?>
 <inkml:ink xmlns:inkml="http://www.w3.org/2003/InkML">
   <inkml:definitions>
     <inkml:context xml:id="ctx0">
@@ -894,7 +862,7 @@
 </inkml:ink>
 </file>
 
-<file path=ppt/ink/ink7.xml><?xml version="1.0" encoding="utf-8"?>
+<file path=ppt/ink/ink9.xml><?xml version="1.0" encoding="utf-8"?>
 <inkml:ink xmlns:inkml="http://www.w3.org/2003/InkML">
   <inkml:definitions>
     <inkml:context xml:id="ctx0">
@@ -923,70 +891,6 @@
     </inkml:brush>
   </inkml:definitions>
   <inkml:trace contextRef="#ctx0" brushRef="#br0">42 20 4488 0 0,'-4'-3'-29'0'0,"0"0"-1"0"0,0 1 1 0 0,0 0-1 0 0,-1 0 1 0 0,1 0-1 0 0,-1 0 1 0 0,-6-1-1 0 0,11 25 28 0 0,1-1 0 0 0,0 1 0 0 0,2-1 0 0 0,1 1-1 0 0,1-1 1 0 0,1 0 0 0 0,9 25 0 0 0,2 9 7 0 0,-8-25-9 0 0,28 120 345 0 0,-31-123-1556 0 0,5-54-291 0 0</inkml:trace>
-</inkml:ink>
-</file>
-
-<file path=ppt/ink/ink8.xml><?xml version="1.0" encoding="utf-8"?>
-<inkml:ink xmlns:inkml="http://www.w3.org/2003/InkML">
-  <inkml:definitions>
-    <inkml:context xml:id="ctx0">
-      <inkml:inkSource xml:id="inkSrc0">
-        <inkml:traceFormat>
-          <inkml:channel name="X" type="integer" min="-2.14748E9" max="2.14748E9" units="cm"/>
-          <inkml:channel name="Y" type="integer" min="-2.14748E9" max="2.14748E9" units="cm"/>
-          <inkml:channel name="F" type="integer" max="32767" units="dev"/>
-          <inkml:channel name="OA" type="integer" max="360" units="deg"/>
-          <inkml:channel name="OE" type="integer" max="90" units="deg"/>
-        </inkml:traceFormat>
-        <inkml:channelProperties>
-          <inkml:channelProperty channel="X" name="resolution" value="1000" units="1/cm"/>
-          <inkml:channelProperty channel="Y" name="resolution" value="1000" units="1/cm"/>
-          <inkml:channelProperty channel="F" name="resolution" value="0" units="1/dev"/>
-          <inkml:channelProperty channel="OA" name="resolution" value="1000" units="1/deg"/>
-          <inkml:channelProperty channel="OE" name="resolution" value="1000" units="1/deg"/>
-        </inkml:channelProperties>
-      </inkml:inkSource>
-      <inkml:timestamp xml:id="ts0" timeString="2026-04-12T05:28:45.048"/>
-    </inkml:context>
-    <inkml:brush xml:id="br0">
-      <inkml:brushProperty name="width" value="0.2" units="cm"/>
-      <inkml:brushProperty name="height" value="0.2" units="cm"/>
-      <inkml:brushProperty name="color" value="#FF0066"/>
-    </inkml:brush>
-  </inkml:definitions>
-  <inkml:trace contextRef="#ctx0" brushRef="#br0">50 258 4108 0 0,'-5'1'-238'0'0,"1"1"0"0"0,0-1 0 0 0,-1 1-1 0 0,1 0 1 0 0,0 0 0 0 0,0 1 0 0 0,-6 4-1 0 0,2-1 143 0 0,6-5 160 0 0,32-6 506 0 0,0 0 0 0 0,-1-2 0 0 0,50-19 0 0 0,-67 21-507 0 0,-1 1-1 0 0,0-2 1 0 0,0 1-1 0 0,19-15 0 0 0,-27 19-15 0 0,0-1-1 0 0,-1-1 0 0 0,0 1 0 0 0,1 0 1 0 0,-1-1-1 0 0,0 1 0 0 0,0-1 1 0 0,0 1-1 0 0,-1-1 0 0 0,1 0 1 0 0,0 0-1 0 0,-1 0 0 0 0,0 0 0 0 0,0 0 1 0 0,0 0-1 0 0,0 0 0 0 0,0 0 1 0 0,-1-1-1 0 0,1 1 0 0 0,-1 0 0 0 0,0 0 1 0 0,0-1-1 0 0,0 1 0 0 0,-1 0 1 0 0,0-4-1 0 0,-3-8 148 0 0,-2 1 0 0 0,0 0 0 0 0,0 1 0 0 0,-1-1-1 0 0,-15-19 1 0 0,22 32-108 0 0,-18-20-68 0 0,17 27-22 0 0,-1-1-1 0 0,1 1 1 0 0,1 0 0 0 0,-1-1-1 0 0,1 1 1 0 0,0 0-1 0 0,0-1 1 0 0,0 1 0 0 0,1 0-1 0 0,0 0 1 0 0,3 10-1 0 0,2 5-12 0 0,5 32 14 0 0,2-1-1 0 0,2-1 0 0 0,23 50 0 0 0,-17-46 44 0 0,-9-8-350 0 0,15-91-2691 0 0,-16 27 980 0 0</inkml:trace>
-</inkml:ink>
-</file>
-
-<file path=ppt/ink/ink9.xml><?xml version="1.0" encoding="utf-8"?>
-<inkml:ink xmlns:inkml="http://www.w3.org/2003/InkML">
-  <inkml:definitions>
-    <inkml:context xml:id="ctx0">
-      <inkml:inkSource xml:id="inkSrc0">
-        <inkml:traceFormat>
-          <inkml:channel name="X" type="integer" min="-2.14748E9" max="2.14748E9" units="cm"/>
-          <inkml:channel name="Y" type="integer" min="-2.14748E9" max="2.14748E9" units="cm"/>
-          <inkml:channel name="F" type="integer" max="32767" units="dev"/>
-          <inkml:channel name="OA" type="integer" max="360" units="deg"/>
-          <inkml:channel name="OE" type="integer" max="90" units="deg"/>
-        </inkml:traceFormat>
-        <inkml:channelProperties>
-          <inkml:channelProperty channel="X" name="resolution" value="1000" units="1/cm"/>
-          <inkml:channelProperty channel="Y" name="resolution" value="1000" units="1/cm"/>
-          <inkml:channelProperty channel="F" name="resolution" value="0" units="1/dev"/>
-          <inkml:channelProperty channel="OA" name="resolution" value="1000" units="1/deg"/>
-          <inkml:channelProperty channel="OE" name="resolution" value="1000" units="1/deg"/>
-        </inkml:channelProperties>
-      </inkml:inkSource>
-      <inkml:timestamp xml:id="ts0" timeString="2026-04-12T05:28:45.561"/>
-    </inkml:context>
-    <inkml:brush xml:id="br0">
-      <inkml:brushProperty name="width" value="0.2" units="cm"/>
-      <inkml:brushProperty name="height" value="0.2" units="cm"/>
-      <inkml:brushProperty name="color" value="#FF0066"/>
-    </inkml:brush>
-  </inkml:definitions>
-  <inkml:trace contextRef="#ctx0" brushRef="#br0">56 0 5048 0 0,'0'0'-277'0'0,"-9"7"-1063"0"0,5-4 1332 0 0,0 1-1 0 0,0-1 0 0 0,0 1 0 0 0,1 0 0 0 0,-1 0 0 0 0,1 1 0 0 0,0-1 1 0 0,0 1-1 0 0,1 0 0 0 0,-1-1 0 0 0,1 1 0 0 0,0 0 0 0 0,0 0 0 0 0,-1 7 1 0 0,3-9 20 0 0,0-1 0 0 0,-1 1 0 0 0,1-1 0 0 0,0 0 0 0 0,1 1 1 0 0,-1-1-1 0 0,0 1 0 0 0,1-1 0 0 0,-1 1 0 0 0,1-1 0 0 0,0 0 1 0 0,-1 0-1 0 0,1 1 0 0 0,0-1 0 0 0,1 0 0 0 0,-1 0 0 0 0,0 0 1 0 0,0 0-1 0 0,1 0 0 0 0,0 0 0 0 0,-1 0 0 0 0,1 0 0 0 0,0-1 1 0 0,0 1-1 0 0,0-1 0 0 0,0 1 0 0 0,0-1 0 0 0,0 0 0 0 0,0 0 1 0 0,0 0-1 0 0,1 0 0 0 0,-1 0 0 0 0,0 0 0 0 0,1-1 0 0 0,-1 1 1 0 0,0-1-1 0 0,1 1 0 0 0,3-1 0 0 0,8 2 159 0 0,-1 0 1 0 0,0-1-1 0 0,1 0 1 0 0,16-2-1 0 0,-26 1-82 0 0,-1 0 0 0 0,1-1 1 0 0,0 1-1 0 0,0-1 0 0 0,-1 0 0 0 0,1 0 1 0 0,-1 0-1 0 0,1-1 0 0 0,-1 1 0 0 0,1-1 1 0 0,-1 0-1 0 0,0 0 0 0 0,0 0 0 0 0,0 0 0 0 0,0-1 1 0 0,0 1-1 0 0,0-1 0 0 0,-1 0 0 0 0,1 0 1 0 0,2-4-1 0 0,-4 6-64 0 0,-1 1 0 0 0,1-1 0 0 0,-1 0 0 0 0,1 0 0 0 0,-1 0 0 0 0,0 0 0 0 0,1 0 0 0 0,-1 1 0 0 0,0-1 0 0 0,0 0 0 0 0,1 0 0 0 0,-1 0 0 0 0,0 0 0 0 0,0 0 0 0 0,0 0 0 0 0,0 0 0 0 0,0 0-1 0 0,-1 0 1 0 0,1 0 0 0 0,0 0 0 0 0,0 1 0 0 0,-1-1 0 0 0,1 0 0 0 0,0 0 0 0 0,-1 0 0 0 0,1 0 0 0 0,-1 0 0 0 0,0-1 0 0 0,-1 1 8 0 0,1 0-1 0 0,-1-1 0 0 0,0 1 1 0 0,0 0-1 0 0,1 0 1 0 0,-1 0-1 0 0,0 0 0 0 0,0 0 1 0 0,0 1-1 0 0,0-1 1 0 0,-4 0-1 0 0,-45-2 142 0 0,-24 21-626 0 0,30-3-2907 0 0</inkml:trace>
 </inkml:ink>
 </file>
 
@@ -1072,7 +976,7 @@
           <a:p>
             <a:fld id="{CB233BD1-3BA8-448D-9D08-7846095EA517}" type="datetimeFigureOut">
               <a:rPr lang="en-US" smtClean="0"/>
-              <a:t>4/12/2026</a:t>
+              <a:t>5/4/2026</a:t>
             </a:fld>
             <a:endParaRPr lang="en-US"/>
           </a:p>
@@ -1486,7 +1390,7 @@
           <a:p>
             <a:fld id="{6383FAE1-13DE-4511-8C1B-C8AFB720664C}" type="datetimeFigureOut">
               <a:rPr lang="en-US" smtClean="0"/>
-              <a:t>4/12/2026</a:t>
+              <a:t>5/4/2026</a:t>
             </a:fld>
             <a:endParaRPr lang="en-US"/>
           </a:p>
@@ -1684,7 +1588,7 @@
           <a:p>
             <a:fld id="{6383FAE1-13DE-4511-8C1B-C8AFB720664C}" type="datetimeFigureOut">
               <a:rPr lang="en-US" smtClean="0"/>
-              <a:t>4/12/2026</a:t>
+              <a:t>5/4/2026</a:t>
             </a:fld>
             <a:endParaRPr lang="en-US"/>
           </a:p>
@@ -1892,7 +1796,7 @@
           <a:p>
             <a:fld id="{6383FAE1-13DE-4511-8C1B-C8AFB720664C}" type="datetimeFigureOut">
               <a:rPr lang="en-US" smtClean="0"/>
-              <a:t>4/12/2026</a:t>
+              <a:t>5/4/2026</a:t>
             </a:fld>
             <a:endParaRPr lang="en-US"/>
           </a:p>
@@ -2090,7 +1994,7 @@
           <a:p>
             <a:fld id="{6383FAE1-13DE-4511-8C1B-C8AFB720664C}" type="datetimeFigureOut">
               <a:rPr lang="en-US" smtClean="0"/>
-              <a:t>4/12/2026</a:t>
+              <a:t>5/4/2026</a:t>
             </a:fld>
             <a:endParaRPr lang="en-US"/>
           </a:p>
@@ -2365,7 +2269,7 @@
           <a:p>
             <a:fld id="{6383FAE1-13DE-4511-8C1B-C8AFB720664C}" type="datetimeFigureOut">
               <a:rPr lang="en-US" smtClean="0"/>
-              <a:t>4/12/2026</a:t>
+              <a:t>5/4/2026</a:t>
             </a:fld>
             <a:endParaRPr lang="en-US"/>
           </a:p>
@@ -2630,7 +2534,7 @@
           <a:p>
             <a:fld id="{6383FAE1-13DE-4511-8C1B-C8AFB720664C}" type="datetimeFigureOut">
               <a:rPr lang="en-US" smtClean="0"/>
-              <a:t>4/12/2026</a:t>
+              <a:t>5/4/2026</a:t>
             </a:fld>
             <a:endParaRPr lang="en-US"/>
           </a:p>
@@ -3042,7 +2946,7 @@
           <a:p>
             <a:fld id="{6383FAE1-13DE-4511-8C1B-C8AFB720664C}" type="datetimeFigureOut">
               <a:rPr lang="en-US" smtClean="0"/>
-              <a:t>4/12/2026</a:t>
+              <a:t>5/4/2026</a:t>
             </a:fld>
             <a:endParaRPr lang="en-US"/>
           </a:p>
@@ -3183,7 +3087,7 @@
           <a:p>
             <a:fld id="{6383FAE1-13DE-4511-8C1B-C8AFB720664C}" type="datetimeFigureOut">
               <a:rPr lang="en-US" smtClean="0"/>
-              <a:t>4/12/2026</a:t>
+              <a:t>5/4/2026</a:t>
             </a:fld>
             <a:endParaRPr lang="en-US"/>
           </a:p>
@@ -3296,7 +3200,7 @@
           <a:p>
             <a:fld id="{6383FAE1-13DE-4511-8C1B-C8AFB720664C}" type="datetimeFigureOut">
               <a:rPr lang="en-US" smtClean="0"/>
-              <a:t>4/12/2026</a:t>
+              <a:t>5/4/2026</a:t>
             </a:fld>
             <a:endParaRPr lang="en-US"/>
           </a:p>
@@ -3607,7 +3511,7 @@
           <a:p>
             <a:fld id="{6383FAE1-13DE-4511-8C1B-C8AFB720664C}" type="datetimeFigureOut">
               <a:rPr lang="en-US" smtClean="0"/>
-              <a:t>4/12/2026</a:t>
+              <a:t>5/4/2026</a:t>
             </a:fld>
             <a:endParaRPr lang="en-US"/>
           </a:p>
@@ -3898,7 +3802,7 @@
           <a:p>
             <a:fld id="{6383FAE1-13DE-4511-8C1B-C8AFB720664C}" type="datetimeFigureOut">
               <a:rPr lang="en-US" smtClean="0"/>
-              <a:t>4/12/2026</a:t>
+              <a:t>5/4/2026</a:t>
             </a:fld>
             <a:endParaRPr lang="en-US"/>
           </a:p>
@@ -4142,7 +4046,7 @@
           <a:p>
             <a:fld id="{6383FAE1-13DE-4511-8C1B-C8AFB720664C}" type="datetimeFigureOut">
               <a:rPr lang="en-US" smtClean="0"/>
-              <a:t>4/12/2026</a:t>
+              <a:t>5/4/2026</a:t>
             </a:fld>
             <a:endParaRPr lang="en-US"/>
           </a:p>
@@ -6859,7 +6763,7 @@
                   </a:schemeClr>
                 </a:solidFill>
               </a:rPr>
-              <a:t>2) A company claims their battery lasts 10 hours. </a:t>
+              <a:t>2) A company claims their medicine decreases blood pressure. </a:t>
             </a:r>
           </a:p>
           <a:p>
@@ -6938,7 +6842,7 @@
         <p:spPr>
           <a:xfrm>
             <a:off x="155448" y="307771"/>
-            <a:ext cx="12036552" cy="5262979"/>
+            <a:ext cx="12036552" cy="4524315"/>
           </a:xfrm>
           <a:prstGeom prst="rect">
             <a:avLst/>
@@ -6950,26 +6854,6 @@
             <a:spAutoFit/>
           </a:bodyPr>
           <a:lstStyle/>
-          <a:p>
-            <a:endParaRPr lang="en-US" sz="2400" dirty="0">
-              <a:solidFill>
-                <a:schemeClr val="accent6">
-                  <a:lumMod val="40000"/>
-                  <a:lumOff val="60000"/>
-                </a:schemeClr>
-              </a:solidFill>
-            </a:endParaRPr>
-          </a:p>
-          <a:p>
-            <a:endParaRPr lang="en-US" sz="2400" dirty="0">
-              <a:solidFill>
-                <a:schemeClr val="accent6">
-                  <a:lumMod val="40000"/>
-                  <a:lumOff val="60000"/>
-                </a:schemeClr>
-              </a:solidFill>
-            </a:endParaRPr>
-          </a:p>
           <a:p>
             <a:r>
               <a:rPr lang="en-US" sz="2400" dirty="0">
@@ -7264,7 +7148,7 @@
         <p:spPr>
           <a:xfrm>
             <a:off x="155448" y="307771"/>
-            <a:ext cx="11292840" cy="5262979"/>
+            <a:ext cx="11292840" cy="3046988"/>
           </a:xfrm>
           <a:prstGeom prst="rect">
             <a:avLst/>
@@ -7570,16 +7454,35 @@
               <a:t> change)</a:t>
             </a:r>
           </a:p>
-          <a:p>
-            <a:endParaRPr lang="en-US" sz="2400" dirty="0">
-              <a:solidFill>
-                <a:schemeClr val="accent6">
-                  <a:lumMod val="60000"/>
-                  <a:lumOff val="40000"/>
-                </a:schemeClr>
-              </a:solidFill>
-            </a:endParaRPr>
-          </a:p>
+        </p:txBody>
+      </p:sp>
+      <p:sp>
+        <p:nvSpPr>
+          <p:cNvPr id="3" name="TextBox 2">
+            <a:extLst>
+              <a:ext uri="{FF2B5EF4-FFF2-40B4-BE49-F238E27FC236}">
+                <a16:creationId xmlns:a16="http://schemas.microsoft.com/office/drawing/2014/main" id="{EF722D07-B760-8CCE-A42D-7FA84292943D}"/>
+              </a:ext>
+            </a:extLst>
+          </p:cNvPr>
+          <p:cNvSpPr txBox="1"/>
+          <p:nvPr/>
+        </p:nvSpPr>
+        <p:spPr>
+          <a:xfrm>
+            <a:off x="269748" y="4110335"/>
+            <a:ext cx="10547604" cy="1200329"/>
+          </a:xfrm>
+          <a:prstGeom prst="rect">
+            <a:avLst/>
+          </a:prstGeom>
+          <a:noFill/>
+        </p:spPr>
+        <p:txBody>
+          <a:bodyPr wrap="square">
+            <a:spAutoFit/>
+          </a:bodyPr>
+          <a:lstStyle/>
           <a:p>
             <a:r>
               <a:rPr lang="en-US" sz="2400" b="1" dirty="0">
@@ -7601,7 +7504,7 @@
                   </a:schemeClr>
                 </a:solidFill>
               </a:rPr>
-              <a:t>: </a:t>
+              <a:t>:</a:t>
             </a:r>
           </a:p>
           <a:p>
@@ -7614,26 +7517,35 @@
                   </a:schemeClr>
                 </a:solidFill>
               </a:rPr>
-              <a:t>The null hypothesis isn’t always only about comparing “population mean vs observed mean” — it can also be about </a:t>
-            </a:r>
-            <a:r>
-              <a:rPr lang="en-US" sz="2400" dirty="0">
-                <a:solidFill>
-                  <a:schemeClr val="accent4">
+              <a:t>The claim is generally the </a:t>
+            </a:r>
+            <a:r>
+              <a:rPr lang="en-US" sz="2400" b="1" dirty="0">
+                <a:solidFill>
+                  <a:schemeClr val="accent6">
                     <a:lumMod val="40000"/>
                     <a:lumOff val="60000"/>
                   </a:schemeClr>
                 </a:solidFill>
               </a:rPr>
-              <a:t>proportions, variances, correlations, regression coefficients, etc.</a:t>
-            </a:r>
-          </a:p>
-          <a:p>
-            <a:endParaRPr lang="en-US" sz="2400" dirty="0">
+              <a:t>alternative hypothesis: </a:t>
+            </a:r>
+            <a:r>
+              <a:rPr lang="en-US" sz="2400" dirty="0">
+                <a:solidFill>
+                  <a:schemeClr val="accent6">
+                    <a:lumMod val="40000"/>
+                    <a:lumOff val="60000"/>
+                  </a:schemeClr>
+                </a:solidFill>
+              </a:rPr>
+              <a:t>This is what the researchers is trying to verify</a:t>
+            </a:r>
+            <a:endParaRPr lang="en-US" sz="2400" b="1" dirty="0">
               <a:solidFill>
-                <a:schemeClr val="accent6">
-                  <a:lumMod val="60000"/>
-                  <a:lumOff val="40000"/>
+                <a:schemeClr val="accent4">
+                  <a:lumMod val="40000"/>
+                  <a:lumOff val="60000"/>
                 </a:schemeClr>
               </a:solidFill>
             </a:endParaRPr>
@@ -8047,6 +7959,425 @@
         <p:cNvPr id="1" name="">
           <a:extLst>
             <a:ext uri="{FF2B5EF4-FFF2-40B4-BE49-F238E27FC236}">
+              <a16:creationId xmlns:a16="http://schemas.microsoft.com/office/drawing/2014/main" id="{C5844CBE-6C1E-A19B-6465-CDAADDD6E2BB}"/>
+            </a:ext>
+          </a:extLst>
+        </p:cNvPr>
+        <p:cNvGrpSpPr/>
+        <p:nvPr/>
+      </p:nvGrpSpPr>
+      <p:grpSpPr>
+        <a:xfrm>
+          <a:off x="0" y="0"/>
+          <a:ext cx="0" cy="0"/>
+          <a:chOff x="0" y="0"/>
+          <a:chExt cx="0" cy="0"/>
+        </a:xfrm>
+      </p:grpSpPr>
+      <p:sp>
+        <p:nvSpPr>
+          <p:cNvPr id="10" name="TextBox 9">
+            <a:extLst>
+              <a:ext uri="{FF2B5EF4-FFF2-40B4-BE49-F238E27FC236}">
+                <a16:creationId xmlns:a16="http://schemas.microsoft.com/office/drawing/2014/main" id="{4B421532-52D2-8F83-2FBA-B0B749917743}"/>
+              </a:ext>
+            </a:extLst>
+          </p:cNvPr>
+          <p:cNvSpPr txBox="1"/>
+          <p:nvPr/>
+        </p:nvSpPr>
+        <p:spPr>
+          <a:xfrm>
+            <a:off x="228600" y="292608"/>
+            <a:ext cx="7808976" cy="3416320"/>
+          </a:xfrm>
+          <a:prstGeom prst="rect">
+            <a:avLst/>
+          </a:prstGeom>
+          <a:noFill/>
+        </p:spPr>
+        <p:txBody>
+          <a:bodyPr wrap="square" rtlCol="0">
+            <a:spAutoFit/>
+          </a:bodyPr>
+          <a:lstStyle/>
+          <a:p>
+            <a:r>
+              <a:rPr lang="en-US" sz="2400" b="1" dirty="0">
+                <a:solidFill>
+                  <a:schemeClr val="accent6">
+                    <a:lumMod val="60000"/>
+                    <a:lumOff val="40000"/>
+                  </a:schemeClr>
+                </a:solidFill>
+              </a:rPr>
+              <a:t>Decision Concept</a:t>
+            </a:r>
+          </a:p>
+          <a:p>
+            <a:endParaRPr lang="en-US" sz="2400" dirty="0">
+              <a:solidFill>
+                <a:schemeClr val="accent6">
+                  <a:lumMod val="60000"/>
+                  <a:lumOff val="40000"/>
+                </a:schemeClr>
+              </a:solidFill>
+            </a:endParaRPr>
+          </a:p>
+          <a:p>
+            <a:r>
+              <a:rPr lang="en-US" sz="2400" dirty="0">
+                <a:solidFill>
+                  <a:schemeClr val="accent6">
+                    <a:lumMod val="60000"/>
+                    <a:lumOff val="40000"/>
+                  </a:schemeClr>
+                </a:solidFill>
+              </a:rPr>
+              <a:t>We collect sample data → then decide:</a:t>
+            </a:r>
+          </a:p>
+          <a:p>
+            <a:pPr marL="342900" indent="-342900">
+              <a:buFont typeface="Arial" panose="020B0604020202020204" pitchFamily="34" charset="0"/>
+              <a:buChar char="•"/>
+            </a:pPr>
+            <a:r>
+              <a:rPr lang="en-US" sz="2400" dirty="0">
+                <a:solidFill>
+                  <a:schemeClr val="accent6">
+                    <a:lumMod val="60000"/>
+                    <a:lumOff val="40000"/>
+                  </a:schemeClr>
+                </a:solidFill>
+              </a:rPr>
+              <a:t>Reject H₀ </a:t>
+            </a:r>
+          </a:p>
+          <a:p>
+            <a:pPr marL="342900" indent="-342900">
+              <a:buFont typeface="Arial" panose="020B0604020202020204" pitchFamily="34" charset="0"/>
+              <a:buChar char="•"/>
+            </a:pPr>
+            <a:r>
+              <a:rPr lang="en-US" sz="2400" dirty="0">
+                <a:solidFill>
+                  <a:schemeClr val="accent6">
+                    <a:lumMod val="60000"/>
+                    <a:lumOff val="40000"/>
+                  </a:schemeClr>
+                </a:solidFill>
+              </a:rPr>
+              <a:t>OR Fail to reject H₀ </a:t>
+            </a:r>
+          </a:p>
+          <a:p>
+            <a:endParaRPr lang="en-US" sz="2400" dirty="0">
+              <a:solidFill>
+                <a:schemeClr val="accent6">
+                  <a:lumMod val="60000"/>
+                  <a:lumOff val="40000"/>
+                </a:schemeClr>
+              </a:solidFill>
+            </a:endParaRPr>
+          </a:p>
+          <a:p>
+            <a:r>
+              <a:rPr lang="en-US" sz="2400" dirty="0">
+                <a:solidFill>
+                  <a:schemeClr val="accent6">
+                    <a:lumMod val="60000"/>
+                    <a:lumOff val="40000"/>
+                  </a:schemeClr>
+                </a:solidFill>
+              </a:rPr>
+              <a:t>⚠️ Important:</a:t>
+            </a:r>
+          </a:p>
+          <a:p>
+            <a:r>
+              <a:rPr lang="en-US" sz="2400" dirty="0">
+                <a:solidFill>
+                  <a:schemeClr val="accent6">
+                    <a:lumMod val="60000"/>
+                    <a:lumOff val="40000"/>
+                  </a:schemeClr>
+                </a:solidFill>
+              </a:rPr>
+              <a:t>We </a:t>
+            </a:r>
+            <a:r>
+              <a:rPr lang="en-US" sz="2400" b="1" dirty="0">
+                <a:solidFill>
+                  <a:schemeClr val="accent6">
+                    <a:lumMod val="60000"/>
+                    <a:lumOff val="40000"/>
+                  </a:schemeClr>
+                </a:solidFill>
+              </a:rPr>
+              <a:t>never say “accept H₀”</a:t>
+            </a:r>
+            <a:r>
+              <a:rPr lang="en-US" sz="2400" dirty="0">
+                <a:solidFill>
+                  <a:schemeClr val="accent6">
+                    <a:lumMod val="60000"/>
+                    <a:lumOff val="40000"/>
+                  </a:schemeClr>
+                </a:solidFill>
+              </a:rPr>
+              <a:t> </a:t>
+            </a:r>
+          </a:p>
+          <a:p>
+            <a:r>
+              <a:rPr lang="en-US" sz="2400" dirty="0">
+                <a:solidFill>
+                  <a:schemeClr val="accent6">
+                    <a:lumMod val="60000"/>
+                    <a:lumOff val="40000"/>
+                  </a:schemeClr>
+                </a:solidFill>
+              </a:rPr>
+              <a:t>Only: “fail to reject”</a:t>
+            </a:r>
+          </a:p>
+        </p:txBody>
+      </p:sp>
+      <p:pic>
+        <p:nvPicPr>
+          <p:cNvPr id="3" name="Picture 2">
+            <a:extLst>
+              <a:ext uri="{FF2B5EF4-FFF2-40B4-BE49-F238E27FC236}">
+                <a16:creationId xmlns:a16="http://schemas.microsoft.com/office/drawing/2014/main" id="{C6A00B00-7FFF-39A2-449D-D489C01D5F04}"/>
+              </a:ext>
+            </a:extLst>
+          </p:cNvPr>
+          <p:cNvPicPr>
+            <a:picLocks noChangeAspect="1"/>
+          </p:cNvPicPr>
+          <p:nvPr/>
+        </p:nvPicPr>
+        <p:blipFill>
+          <a:blip r:embed="rId2">
+            <a:extLst>
+              <a:ext uri="{28A0092B-C50C-407E-A947-70E740481C1C}">
+                <a14:useLocalDpi xmlns:a14="http://schemas.microsoft.com/office/drawing/2010/main" val="0"/>
+              </a:ext>
+            </a:extLst>
+          </a:blip>
+          <a:stretch>
+            <a:fillRect/>
+          </a:stretch>
+        </p:blipFill>
+        <p:spPr>
+          <a:xfrm>
+            <a:off x="7737648" y="2557908"/>
+            <a:ext cx="4054302" cy="1742184"/>
+          </a:xfrm>
+          <a:prstGeom prst="rect">
+            <a:avLst/>
+          </a:prstGeom>
+        </p:spPr>
+      </p:pic>
+      <p:pic>
+        <p:nvPicPr>
+          <p:cNvPr id="4" name="Picture 3">
+            <a:extLst>
+              <a:ext uri="{FF2B5EF4-FFF2-40B4-BE49-F238E27FC236}">
+                <a16:creationId xmlns:a16="http://schemas.microsoft.com/office/drawing/2014/main" id="{D896A4A9-9B5F-FAA5-8023-ABBD64ECF4B4}"/>
+              </a:ext>
+            </a:extLst>
+          </p:cNvPr>
+          <p:cNvPicPr>
+            <a:picLocks noChangeAspect="1"/>
+          </p:cNvPicPr>
+          <p:nvPr/>
+        </p:nvPicPr>
+        <p:blipFill>
+          <a:blip r:embed="rId3">
+            <a:extLst>
+              <a:ext uri="{28A0092B-C50C-407E-A947-70E740481C1C}">
+                <a14:useLocalDpi xmlns:a14="http://schemas.microsoft.com/office/drawing/2010/main" val="0"/>
+              </a:ext>
+            </a:extLst>
+          </a:blip>
+          <a:stretch>
+            <a:fillRect/>
+          </a:stretch>
+        </p:blipFill>
+        <p:spPr>
+          <a:xfrm>
+            <a:off x="7658691" y="198867"/>
+            <a:ext cx="3857034" cy="2097294"/>
+          </a:xfrm>
+          <a:prstGeom prst="rect">
+            <a:avLst/>
+          </a:prstGeom>
+        </p:spPr>
+      </p:pic>
+      <p:pic>
+        <p:nvPicPr>
+          <p:cNvPr id="6" name="Picture 5">
+            <a:extLst>
+              <a:ext uri="{FF2B5EF4-FFF2-40B4-BE49-F238E27FC236}">
+                <a16:creationId xmlns:a16="http://schemas.microsoft.com/office/drawing/2014/main" id="{7865B5FF-2DCF-CE39-74C7-922FFAC15685}"/>
+              </a:ext>
+            </a:extLst>
+          </p:cNvPr>
+          <p:cNvPicPr>
+            <a:picLocks noChangeAspect="1"/>
+          </p:cNvPicPr>
+          <p:nvPr/>
+        </p:nvPicPr>
+        <p:blipFill>
+          <a:blip r:embed="rId4">
+            <a:extLst>
+              <a:ext uri="{28A0092B-C50C-407E-A947-70E740481C1C}">
+                <a14:useLocalDpi xmlns:a14="http://schemas.microsoft.com/office/drawing/2010/main" val="0"/>
+              </a:ext>
+            </a:extLst>
+          </a:blip>
+          <a:stretch>
+            <a:fillRect/>
+          </a:stretch>
+        </p:blipFill>
+        <p:spPr>
+          <a:xfrm>
+            <a:off x="7737648" y="4561839"/>
+            <a:ext cx="4152781" cy="2097294"/>
+          </a:xfrm>
+          <a:prstGeom prst="rect">
+            <a:avLst/>
+          </a:prstGeom>
+        </p:spPr>
+      </p:pic>
+      <mc:AlternateContent xmlns:mc="http://schemas.openxmlformats.org/markup-compatibility/2006" xmlns:p14="http://schemas.microsoft.com/office/powerpoint/2010/main">
+        <mc:Choice Requires="p14">
+          <p:contentPart p14:bwMode="auto" r:id="rId5">
+            <p14:nvContentPartPr>
+              <p14:cNvPr id="2" name="Ink 1">
+                <a:extLst>
+                  <a:ext uri="{FF2B5EF4-FFF2-40B4-BE49-F238E27FC236}">
+                    <a16:creationId xmlns:a16="http://schemas.microsoft.com/office/drawing/2014/main" id="{905A919E-ABDE-686B-3318-8B61D729A2A1}"/>
+                  </a:ext>
+                </a:extLst>
+              </p14:cNvPr>
+              <p14:cNvContentPartPr/>
+              <p14:nvPr/>
+            </p14:nvContentPartPr>
+            <p14:xfrm>
+              <a:off x="1238175" y="2939115"/>
+              <a:ext cx="493920" cy="95760"/>
+            </p14:xfrm>
+          </p:contentPart>
+        </mc:Choice>
+        <mc:Fallback xmlns="">
+          <p:pic>
+            <p:nvPicPr>
+              <p:cNvPr id="2" name="Ink 1">
+                <a:extLst>
+                  <a:ext uri="{FF2B5EF4-FFF2-40B4-BE49-F238E27FC236}">
+                    <a16:creationId xmlns:a16="http://schemas.microsoft.com/office/drawing/2014/main" id="{905A919E-ABDE-686B-3318-8B61D729A2A1}"/>
+                  </a:ext>
+                </a:extLst>
+              </p:cNvPr>
+              <p:cNvPicPr/>
+              <p:nvPr/>
+            </p:nvPicPr>
+            <p:blipFill>
+              <a:blip r:embed="rId6"/>
+              <a:stretch>
+                <a:fillRect/>
+              </a:stretch>
+            </p:blipFill>
+            <p:spPr>
+              <a:xfrm>
+                <a:off x="1202175" y="2903115"/>
+                <a:ext cx="565560" cy="167400"/>
+              </a:xfrm>
+              <a:prstGeom prst="rect">
+                <a:avLst/>
+              </a:prstGeom>
+            </p:spPr>
+          </p:pic>
+        </mc:Fallback>
+      </mc:AlternateContent>
+      <mc:AlternateContent xmlns:mc="http://schemas.openxmlformats.org/markup-compatibility/2006" xmlns:p14="http://schemas.microsoft.com/office/powerpoint/2010/main">
+        <mc:Choice Requires="p14">
+          <p:contentPart p14:bwMode="auto" r:id="rId7">
+            <p14:nvContentPartPr>
+              <p14:cNvPr id="5" name="Ink 4">
+                <a:extLst>
+                  <a:ext uri="{FF2B5EF4-FFF2-40B4-BE49-F238E27FC236}">
+                    <a16:creationId xmlns:a16="http://schemas.microsoft.com/office/drawing/2014/main" id="{DD5C5F55-BC63-8204-CBFF-1F4E658509C7}"/>
+                  </a:ext>
+                </a:extLst>
+              </p14:cNvPr>
+              <p14:cNvContentPartPr/>
+              <p14:nvPr/>
+            </p14:nvContentPartPr>
+            <p14:xfrm>
+              <a:off x="1323855" y="2561835"/>
+              <a:ext cx="360" cy="360"/>
+            </p14:xfrm>
+          </p:contentPart>
+        </mc:Choice>
+        <mc:Fallback xmlns="">
+          <p:pic>
+            <p:nvPicPr>
+              <p:cNvPr id="5" name="Ink 4">
+                <a:extLst>
+                  <a:ext uri="{FF2B5EF4-FFF2-40B4-BE49-F238E27FC236}">
+                    <a16:creationId xmlns:a16="http://schemas.microsoft.com/office/drawing/2014/main" id="{DD5C5F55-BC63-8204-CBFF-1F4E658509C7}"/>
+                  </a:ext>
+                </a:extLst>
+              </p:cNvPr>
+              <p:cNvPicPr/>
+              <p:nvPr/>
+            </p:nvPicPr>
+            <p:blipFill>
+              <a:blip r:embed="rId8"/>
+              <a:stretch>
+                <a:fillRect/>
+              </a:stretch>
+            </p:blipFill>
+            <p:spPr>
+              <a:xfrm>
+                <a:off x="1287855" y="2525835"/>
+                <a:ext cx="72000" cy="72000"/>
+              </a:xfrm>
+              <a:prstGeom prst="rect">
+                <a:avLst/>
+              </a:prstGeom>
+            </p:spPr>
+          </p:pic>
+        </mc:Fallback>
+      </mc:AlternateContent>
+    </p:spTree>
+    <p:extLst>
+      <p:ext uri="{BB962C8B-B14F-4D97-AF65-F5344CB8AC3E}">
+        <p14:creationId xmlns:p14="http://schemas.microsoft.com/office/powerpoint/2010/main" val="3633352162"/>
+      </p:ext>
+    </p:extLst>
+  </p:cSld>
+  <p:clrMapOvr>
+    <a:masterClrMapping/>
+  </p:clrMapOvr>
+  <p:transition spd="slow">
+    <p:push dir="u"/>
+  </p:transition>
+</p:sld>
+</file>
+
+<file path=ppt/slides/slide7.xml><?xml version="1.0" encoding="utf-8"?>
+<p:sld xmlns:a="http://schemas.openxmlformats.org/drawingml/2006/main" xmlns:r="http://schemas.openxmlformats.org/officeDocument/2006/relationships" xmlns:p="http://schemas.openxmlformats.org/presentationml/2006/main">
+  <p:cSld>
+    <p:spTree>
+      <p:nvGrpSpPr>
+        <p:cNvPr id="1" name="">
+          <a:extLst>
+            <a:ext uri="{FF2B5EF4-FFF2-40B4-BE49-F238E27FC236}">
               <a16:creationId xmlns:a16="http://schemas.microsoft.com/office/drawing/2014/main" id="{CA1E5A10-4F5D-CF67-C125-D68E5B620A9A}"/>
             </a:ext>
           </a:extLst>
@@ -8512,8 +8843,8 @@
             <a:chExt cx="291960" cy="209520"/>
           </a:xfrm>
         </p:grpSpPr>
-        <mc:AlternateContent xmlns:mc="http://schemas.openxmlformats.org/markup-compatibility/2006">
-          <mc:Choice xmlns:p14="http://schemas.microsoft.com/office/powerpoint/2010/main" Requires="p14">
+        <mc:AlternateContent xmlns:mc="http://schemas.openxmlformats.org/markup-compatibility/2006" xmlns:p14="http://schemas.microsoft.com/office/powerpoint/2010/main">
+          <mc:Choice Requires="p14">
             <p:contentPart p14:bwMode="auto" r:id="rId5">
               <p14:nvContentPartPr>
                 <p14:cNvPr id="15" name="Ink 14">
@@ -8532,7 +8863,7 @@
               </p14:xfrm>
             </p:contentPart>
           </mc:Choice>
-          <mc:Fallback>
+          <mc:Fallback xmlns="">
             <p:pic>
               <p:nvPicPr>
                 <p:cNvPr id="15" name="Ink 14">
@@ -8563,8 +8894,8 @@
             </p:pic>
           </mc:Fallback>
         </mc:AlternateContent>
-        <mc:AlternateContent xmlns:mc="http://schemas.openxmlformats.org/markup-compatibility/2006">
-          <mc:Choice xmlns:p14="http://schemas.microsoft.com/office/powerpoint/2010/main" Requires="p14">
+        <mc:AlternateContent xmlns:mc="http://schemas.openxmlformats.org/markup-compatibility/2006" xmlns:p14="http://schemas.microsoft.com/office/powerpoint/2010/main">
+          <mc:Choice Requires="p14">
             <p:contentPart p14:bwMode="auto" r:id="rId7">
               <p14:nvContentPartPr>
                 <p14:cNvPr id="16" name="Ink 15">
@@ -8583,7 +8914,7 @@
               </p14:xfrm>
             </p:contentPart>
           </mc:Choice>
-          <mc:Fallback>
+          <mc:Fallback xmlns="">
             <p:pic>
               <p:nvPicPr>
                 <p:cNvPr id="16" name="Ink 15">
@@ -8614,8 +8945,8 @@
             </p:pic>
           </mc:Fallback>
         </mc:AlternateContent>
-        <mc:AlternateContent xmlns:mc="http://schemas.openxmlformats.org/markup-compatibility/2006">
-          <mc:Choice xmlns:p14="http://schemas.microsoft.com/office/powerpoint/2010/main" Requires="p14">
+        <mc:AlternateContent xmlns:mc="http://schemas.openxmlformats.org/markup-compatibility/2006" xmlns:p14="http://schemas.microsoft.com/office/powerpoint/2010/main">
+          <mc:Choice Requires="p14">
             <p:contentPart p14:bwMode="auto" r:id="rId9">
               <p14:nvContentPartPr>
                 <p14:cNvPr id="17" name="Ink 16">
@@ -8634,7 +8965,7 @@
               </p14:xfrm>
             </p:contentPart>
           </mc:Choice>
-          <mc:Fallback>
+          <mc:Fallback xmlns="">
             <p:pic>
               <p:nvPicPr>
                 <p:cNvPr id="17" name="Ink 16">
@@ -8686,8 +9017,8 @@
             <a:chExt cx="442800" cy="189720"/>
           </a:xfrm>
         </p:grpSpPr>
-        <mc:AlternateContent xmlns:mc="http://schemas.openxmlformats.org/markup-compatibility/2006">
-          <mc:Choice xmlns:p14="http://schemas.microsoft.com/office/powerpoint/2010/main" Requires="p14">
+        <mc:AlternateContent xmlns:mc="http://schemas.openxmlformats.org/markup-compatibility/2006" xmlns:p14="http://schemas.microsoft.com/office/powerpoint/2010/main">
+          <mc:Choice Requires="p14">
             <p:contentPart p14:bwMode="auto" r:id="rId11">
               <p14:nvContentPartPr>
                 <p14:cNvPr id="19" name="Ink 18">
@@ -8706,7 +9037,7 @@
               </p14:xfrm>
             </p:contentPart>
           </mc:Choice>
-          <mc:Fallback>
+          <mc:Fallback xmlns="">
             <p:pic>
               <p:nvPicPr>
                 <p:cNvPr id="19" name="Ink 18">
@@ -8737,8 +9068,8 @@
             </p:pic>
           </mc:Fallback>
         </mc:AlternateContent>
-        <mc:AlternateContent xmlns:mc="http://schemas.openxmlformats.org/markup-compatibility/2006">
-          <mc:Choice xmlns:p14="http://schemas.microsoft.com/office/powerpoint/2010/main" Requires="p14">
+        <mc:AlternateContent xmlns:mc="http://schemas.openxmlformats.org/markup-compatibility/2006" xmlns:p14="http://schemas.microsoft.com/office/powerpoint/2010/main">
+          <mc:Choice Requires="p14">
             <p:contentPart p14:bwMode="auto" r:id="rId13">
               <p14:nvContentPartPr>
                 <p14:cNvPr id="20" name="Ink 19">
@@ -8757,7 +9088,7 @@
               </p14:xfrm>
             </p:contentPart>
           </mc:Choice>
-          <mc:Fallback>
+          <mc:Fallback xmlns="">
             <p:pic>
               <p:nvPicPr>
                 <p:cNvPr id="20" name="Ink 19">
@@ -8788,8 +9119,8 @@
             </p:pic>
           </mc:Fallback>
         </mc:AlternateContent>
-        <mc:AlternateContent xmlns:mc="http://schemas.openxmlformats.org/markup-compatibility/2006">
-          <mc:Choice xmlns:p14="http://schemas.microsoft.com/office/powerpoint/2010/main" Requires="p14">
+        <mc:AlternateContent xmlns:mc="http://schemas.openxmlformats.org/markup-compatibility/2006" xmlns:p14="http://schemas.microsoft.com/office/powerpoint/2010/main">
+          <mc:Choice Requires="p14">
             <p:contentPart p14:bwMode="auto" r:id="rId15">
               <p14:nvContentPartPr>
                 <p14:cNvPr id="21" name="Ink 20">
@@ -8808,7 +9139,7 @@
               </p14:xfrm>
             </p:contentPart>
           </mc:Choice>
-          <mc:Fallback>
+          <mc:Fallback xmlns="">
             <p:pic>
               <p:nvPicPr>
                 <p:cNvPr id="21" name="Ink 20">
@@ -8860,8 +9191,8 @@
             <a:chExt cx="329760" cy="182160"/>
           </a:xfrm>
         </p:grpSpPr>
-        <mc:AlternateContent xmlns:mc="http://schemas.openxmlformats.org/markup-compatibility/2006">
-          <mc:Choice xmlns:p14="http://schemas.microsoft.com/office/powerpoint/2010/main" Requires="p14">
+        <mc:AlternateContent xmlns:mc="http://schemas.openxmlformats.org/markup-compatibility/2006" xmlns:p14="http://schemas.microsoft.com/office/powerpoint/2010/main">
+          <mc:Choice Requires="p14">
             <p:contentPart p14:bwMode="auto" r:id="rId17">
               <p14:nvContentPartPr>
                 <p14:cNvPr id="23" name="Ink 22">
@@ -8880,7 +9211,7 @@
               </p14:xfrm>
             </p:contentPart>
           </mc:Choice>
-          <mc:Fallback>
+          <mc:Fallback xmlns="">
             <p:pic>
               <p:nvPicPr>
                 <p:cNvPr id="23" name="Ink 22">
@@ -8911,8 +9242,8 @@
             </p:pic>
           </mc:Fallback>
         </mc:AlternateContent>
-        <mc:AlternateContent xmlns:mc="http://schemas.openxmlformats.org/markup-compatibility/2006">
-          <mc:Choice xmlns:p14="http://schemas.microsoft.com/office/powerpoint/2010/main" Requires="p14">
+        <mc:AlternateContent xmlns:mc="http://schemas.openxmlformats.org/markup-compatibility/2006" xmlns:p14="http://schemas.microsoft.com/office/powerpoint/2010/main">
+          <mc:Choice Requires="p14">
             <p:contentPart p14:bwMode="auto" r:id="rId19">
               <p14:nvContentPartPr>
                 <p14:cNvPr id="24" name="Ink 23">
@@ -8931,7 +9262,7 @@
               </p14:xfrm>
             </p:contentPart>
           </mc:Choice>
-          <mc:Fallback>
+          <mc:Fallback xmlns="">
             <p:pic>
               <p:nvPicPr>
                 <p:cNvPr id="24" name="Ink 23">
@@ -8962,8 +9293,8 @@
             </p:pic>
           </mc:Fallback>
         </mc:AlternateContent>
-        <mc:AlternateContent xmlns:mc="http://schemas.openxmlformats.org/markup-compatibility/2006">
-          <mc:Choice xmlns:p14="http://schemas.microsoft.com/office/powerpoint/2010/main" Requires="p14">
+        <mc:AlternateContent xmlns:mc="http://schemas.openxmlformats.org/markup-compatibility/2006" xmlns:p14="http://schemas.microsoft.com/office/powerpoint/2010/main">
+          <mc:Choice Requires="p14">
             <p:contentPart p14:bwMode="auto" r:id="rId21">
               <p14:nvContentPartPr>
                 <p14:cNvPr id="25" name="Ink 24">
@@ -8982,7 +9313,7 @@
               </p14:xfrm>
             </p:contentPart>
           </mc:Choice>
-          <mc:Fallback>
+          <mc:Fallback xmlns="">
             <p:pic>
               <p:nvPicPr>
                 <p:cNvPr id="25" name="Ink 24">
@@ -9034,8 +9365,8 @@
             <a:chExt cx="346320" cy="185040"/>
           </a:xfrm>
         </p:grpSpPr>
-        <mc:AlternateContent xmlns:mc="http://schemas.openxmlformats.org/markup-compatibility/2006">
-          <mc:Choice xmlns:p14="http://schemas.microsoft.com/office/powerpoint/2010/main" Requires="p14">
+        <mc:AlternateContent xmlns:mc="http://schemas.openxmlformats.org/markup-compatibility/2006" xmlns:p14="http://schemas.microsoft.com/office/powerpoint/2010/main">
+          <mc:Choice Requires="p14">
             <p:contentPart p14:bwMode="auto" r:id="rId23">
               <p14:nvContentPartPr>
                 <p14:cNvPr id="27" name="Ink 26">
@@ -9054,7 +9385,7 @@
               </p14:xfrm>
             </p:contentPart>
           </mc:Choice>
-          <mc:Fallback>
+          <mc:Fallback xmlns="">
             <p:pic>
               <p:nvPicPr>
                 <p:cNvPr id="27" name="Ink 26">
@@ -9085,8 +9416,8 @@
             </p:pic>
           </mc:Fallback>
         </mc:AlternateContent>
-        <mc:AlternateContent xmlns:mc="http://schemas.openxmlformats.org/markup-compatibility/2006">
-          <mc:Choice xmlns:p14="http://schemas.microsoft.com/office/powerpoint/2010/main" Requires="p14">
+        <mc:AlternateContent xmlns:mc="http://schemas.openxmlformats.org/markup-compatibility/2006" xmlns:p14="http://schemas.microsoft.com/office/powerpoint/2010/main">
+          <mc:Choice Requires="p14">
             <p:contentPart p14:bwMode="auto" r:id="rId25">
               <p14:nvContentPartPr>
                 <p14:cNvPr id="28" name="Ink 27">
@@ -9105,7 +9436,7 @@
               </p14:xfrm>
             </p:contentPart>
           </mc:Choice>
-          <mc:Fallback>
+          <mc:Fallback xmlns="">
             <p:pic>
               <p:nvPicPr>
                 <p:cNvPr id="28" name="Ink 27">
@@ -9136,8 +9467,8 @@
             </p:pic>
           </mc:Fallback>
         </mc:AlternateContent>
-        <mc:AlternateContent xmlns:mc="http://schemas.openxmlformats.org/markup-compatibility/2006">
-          <mc:Choice xmlns:p14="http://schemas.microsoft.com/office/powerpoint/2010/main" Requires="p14">
+        <mc:AlternateContent xmlns:mc="http://schemas.openxmlformats.org/markup-compatibility/2006" xmlns:p14="http://schemas.microsoft.com/office/powerpoint/2010/main">
+          <mc:Choice Requires="p14">
             <p:contentPart p14:bwMode="auto" r:id="rId27">
               <p14:nvContentPartPr>
                 <p14:cNvPr id="29" name="Ink 28">
@@ -9156,7 +9487,7 @@
               </p14:xfrm>
             </p:contentPart>
           </mc:Choice>
-          <mc:Fallback>
+          <mc:Fallback xmlns="">
             <p:pic>
               <p:nvPicPr>
                 <p:cNvPr id="29" name="Ink 28">
@@ -9204,425 +9535,6 @@
 </p:sld>
 </file>
 
-<file path=ppt/slides/slide7.xml><?xml version="1.0" encoding="utf-8"?>
-<p:sld xmlns:a="http://schemas.openxmlformats.org/drawingml/2006/main" xmlns:r="http://schemas.openxmlformats.org/officeDocument/2006/relationships" xmlns:p="http://schemas.openxmlformats.org/presentationml/2006/main">
-  <p:cSld>
-    <p:spTree>
-      <p:nvGrpSpPr>
-        <p:cNvPr id="1" name="">
-          <a:extLst>
-            <a:ext uri="{FF2B5EF4-FFF2-40B4-BE49-F238E27FC236}">
-              <a16:creationId xmlns:a16="http://schemas.microsoft.com/office/drawing/2014/main" id="{C5844CBE-6C1E-A19B-6465-CDAADDD6E2BB}"/>
-            </a:ext>
-          </a:extLst>
-        </p:cNvPr>
-        <p:cNvGrpSpPr/>
-        <p:nvPr/>
-      </p:nvGrpSpPr>
-      <p:grpSpPr>
-        <a:xfrm>
-          <a:off x="0" y="0"/>
-          <a:ext cx="0" cy="0"/>
-          <a:chOff x="0" y="0"/>
-          <a:chExt cx="0" cy="0"/>
-        </a:xfrm>
-      </p:grpSpPr>
-      <p:sp>
-        <p:nvSpPr>
-          <p:cNvPr id="10" name="TextBox 9">
-            <a:extLst>
-              <a:ext uri="{FF2B5EF4-FFF2-40B4-BE49-F238E27FC236}">
-                <a16:creationId xmlns:a16="http://schemas.microsoft.com/office/drawing/2014/main" id="{4B421532-52D2-8F83-2FBA-B0B749917743}"/>
-              </a:ext>
-            </a:extLst>
-          </p:cNvPr>
-          <p:cNvSpPr txBox="1"/>
-          <p:nvPr/>
-        </p:nvSpPr>
-        <p:spPr>
-          <a:xfrm>
-            <a:off x="228600" y="292608"/>
-            <a:ext cx="7808976" cy="3416320"/>
-          </a:xfrm>
-          <a:prstGeom prst="rect">
-            <a:avLst/>
-          </a:prstGeom>
-          <a:noFill/>
-        </p:spPr>
-        <p:txBody>
-          <a:bodyPr wrap="square" rtlCol="0">
-            <a:spAutoFit/>
-          </a:bodyPr>
-          <a:lstStyle/>
-          <a:p>
-            <a:r>
-              <a:rPr lang="en-US" sz="2400" b="1" dirty="0">
-                <a:solidFill>
-                  <a:schemeClr val="accent6">
-                    <a:lumMod val="60000"/>
-                    <a:lumOff val="40000"/>
-                  </a:schemeClr>
-                </a:solidFill>
-              </a:rPr>
-              <a:t>Decision Concept</a:t>
-            </a:r>
-          </a:p>
-          <a:p>
-            <a:endParaRPr lang="en-US" sz="2400" dirty="0">
-              <a:solidFill>
-                <a:schemeClr val="accent6">
-                  <a:lumMod val="60000"/>
-                  <a:lumOff val="40000"/>
-                </a:schemeClr>
-              </a:solidFill>
-            </a:endParaRPr>
-          </a:p>
-          <a:p>
-            <a:r>
-              <a:rPr lang="en-US" sz="2400" dirty="0">
-                <a:solidFill>
-                  <a:schemeClr val="accent6">
-                    <a:lumMod val="60000"/>
-                    <a:lumOff val="40000"/>
-                  </a:schemeClr>
-                </a:solidFill>
-              </a:rPr>
-              <a:t>We collect sample data → then decide:</a:t>
-            </a:r>
-          </a:p>
-          <a:p>
-            <a:pPr marL="342900" indent="-342900">
-              <a:buFont typeface="Arial" panose="020B0604020202020204" pitchFamily="34" charset="0"/>
-              <a:buChar char="•"/>
-            </a:pPr>
-            <a:r>
-              <a:rPr lang="en-US" sz="2400" dirty="0">
-                <a:solidFill>
-                  <a:schemeClr val="accent6">
-                    <a:lumMod val="60000"/>
-                    <a:lumOff val="40000"/>
-                  </a:schemeClr>
-                </a:solidFill>
-              </a:rPr>
-              <a:t>Reject H₀ </a:t>
-            </a:r>
-          </a:p>
-          <a:p>
-            <a:pPr marL="342900" indent="-342900">
-              <a:buFont typeface="Arial" panose="020B0604020202020204" pitchFamily="34" charset="0"/>
-              <a:buChar char="•"/>
-            </a:pPr>
-            <a:r>
-              <a:rPr lang="en-US" sz="2400" dirty="0">
-                <a:solidFill>
-                  <a:schemeClr val="accent6">
-                    <a:lumMod val="60000"/>
-                    <a:lumOff val="40000"/>
-                  </a:schemeClr>
-                </a:solidFill>
-              </a:rPr>
-              <a:t>OR Fail to reject H₀ </a:t>
-            </a:r>
-          </a:p>
-          <a:p>
-            <a:endParaRPr lang="en-US" sz="2400" dirty="0">
-              <a:solidFill>
-                <a:schemeClr val="accent6">
-                  <a:lumMod val="60000"/>
-                  <a:lumOff val="40000"/>
-                </a:schemeClr>
-              </a:solidFill>
-            </a:endParaRPr>
-          </a:p>
-          <a:p>
-            <a:r>
-              <a:rPr lang="en-US" sz="2400" dirty="0">
-                <a:solidFill>
-                  <a:schemeClr val="accent6">
-                    <a:lumMod val="60000"/>
-                    <a:lumOff val="40000"/>
-                  </a:schemeClr>
-                </a:solidFill>
-              </a:rPr>
-              <a:t>⚠️ Important:</a:t>
-            </a:r>
-          </a:p>
-          <a:p>
-            <a:r>
-              <a:rPr lang="en-US" sz="2400" dirty="0">
-                <a:solidFill>
-                  <a:schemeClr val="accent6">
-                    <a:lumMod val="60000"/>
-                    <a:lumOff val="40000"/>
-                  </a:schemeClr>
-                </a:solidFill>
-              </a:rPr>
-              <a:t>We </a:t>
-            </a:r>
-            <a:r>
-              <a:rPr lang="en-US" sz="2400" b="1" dirty="0">
-                <a:solidFill>
-                  <a:schemeClr val="accent6">
-                    <a:lumMod val="60000"/>
-                    <a:lumOff val="40000"/>
-                  </a:schemeClr>
-                </a:solidFill>
-              </a:rPr>
-              <a:t>never say “accept H₀”</a:t>
-            </a:r>
-            <a:r>
-              <a:rPr lang="en-US" sz="2400" dirty="0">
-                <a:solidFill>
-                  <a:schemeClr val="accent6">
-                    <a:lumMod val="60000"/>
-                    <a:lumOff val="40000"/>
-                  </a:schemeClr>
-                </a:solidFill>
-              </a:rPr>
-              <a:t> </a:t>
-            </a:r>
-          </a:p>
-          <a:p>
-            <a:r>
-              <a:rPr lang="en-US" sz="2400" dirty="0">
-                <a:solidFill>
-                  <a:schemeClr val="accent6">
-                    <a:lumMod val="60000"/>
-                    <a:lumOff val="40000"/>
-                  </a:schemeClr>
-                </a:solidFill>
-              </a:rPr>
-              <a:t>Only: “fail to reject”</a:t>
-            </a:r>
-          </a:p>
-        </p:txBody>
-      </p:sp>
-      <p:pic>
-        <p:nvPicPr>
-          <p:cNvPr id="3" name="Picture 2">
-            <a:extLst>
-              <a:ext uri="{FF2B5EF4-FFF2-40B4-BE49-F238E27FC236}">
-                <a16:creationId xmlns:a16="http://schemas.microsoft.com/office/drawing/2014/main" id="{C6A00B00-7FFF-39A2-449D-D489C01D5F04}"/>
-              </a:ext>
-            </a:extLst>
-          </p:cNvPr>
-          <p:cNvPicPr>
-            <a:picLocks noChangeAspect="1"/>
-          </p:cNvPicPr>
-          <p:nvPr/>
-        </p:nvPicPr>
-        <p:blipFill>
-          <a:blip r:embed="rId2">
-            <a:extLst>
-              <a:ext uri="{28A0092B-C50C-407E-A947-70E740481C1C}">
-                <a14:useLocalDpi xmlns:a14="http://schemas.microsoft.com/office/drawing/2010/main" val="0"/>
-              </a:ext>
-            </a:extLst>
-          </a:blip>
-          <a:stretch>
-            <a:fillRect/>
-          </a:stretch>
-        </p:blipFill>
-        <p:spPr>
-          <a:xfrm>
-            <a:off x="7737648" y="2557908"/>
-            <a:ext cx="4054302" cy="1742184"/>
-          </a:xfrm>
-          <a:prstGeom prst="rect">
-            <a:avLst/>
-          </a:prstGeom>
-        </p:spPr>
-      </p:pic>
-      <p:pic>
-        <p:nvPicPr>
-          <p:cNvPr id="4" name="Picture 3">
-            <a:extLst>
-              <a:ext uri="{FF2B5EF4-FFF2-40B4-BE49-F238E27FC236}">
-                <a16:creationId xmlns:a16="http://schemas.microsoft.com/office/drawing/2014/main" id="{D896A4A9-9B5F-FAA5-8023-ABBD64ECF4B4}"/>
-              </a:ext>
-            </a:extLst>
-          </p:cNvPr>
-          <p:cNvPicPr>
-            <a:picLocks noChangeAspect="1"/>
-          </p:cNvPicPr>
-          <p:nvPr/>
-        </p:nvPicPr>
-        <p:blipFill>
-          <a:blip r:embed="rId3">
-            <a:extLst>
-              <a:ext uri="{28A0092B-C50C-407E-A947-70E740481C1C}">
-                <a14:useLocalDpi xmlns:a14="http://schemas.microsoft.com/office/drawing/2010/main" val="0"/>
-              </a:ext>
-            </a:extLst>
-          </a:blip>
-          <a:stretch>
-            <a:fillRect/>
-          </a:stretch>
-        </p:blipFill>
-        <p:spPr>
-          <a:xfrm>
-            <a:off x="7658691" y="198867"/>
-            <a:ext cx="3857034" cy="2097294"/>
-          </a:xfrm>
-          <a:prstGeom prst="rect">
-            <a:avLst/>
-          </a:prstGeom>
-        </p:spPr>
-      </p:pic>
-      <p:pic>
-        <p:nvPicPr>
-          <p:cNvPr id="6" name="Picture 5">
-            <a:extLst>
-              <a:ext uri="{FF2B5EF4-FFF2-40B4-BE49-F238E27FC236}">
-                <a16:creationId xmlns:a16="http://schemas.microsoft.com/office/drawing/2014/main" id="{7865B5FF-2DCF-CE39-74C7-922FFAC15685}"/>
-              </a:ext>
-            </a:extLst>
-          </p:cNvPr>
-          <p:cNvPicPr>
-            <a:picLocks noChangeAspect="1"/>
-          </p:cNvPicPr>
-          <p:nvPr/>
-        </p:nvPicPr>
-        <p:blipFill>
-          <a:blip r:embed="rId4">
-            <a:extLst>
-              <a:ext uri="{28A0092B-C50C-407E-A947-70E740481C1C}">
-                <a14:useLocalDpi xmlns:a14="http://schemas.microsoft.com/office/drawing/2010/main" val="0"/>
-              </a:ext>
-            </a:extLst>
-          </a:blip>
-          <a:stretch>
-            <a:fillRect/>
-          </a:stretch>
-        </p:blipFill>
-        <p:spPr>
-          <a:xfrm>
-            <a:off x="7737648" y="4561839"/>
-            <a:ext cx="4152781" cy="2097294"/>
-          </a:xfrm>
-          <a:prstGeom prst="rect">
-            <a:avLst/>
-          </a:prstGeom>
-        </p:spPr>
-      </p:pic>
-      <mc:AlternateContent xmlns:mc="http://schemas.openxmlformats.org/markup-compatibility/2006">
-        <mc:Choice xmlns:p14="http://schemas.microsoft.com/office/powerpoint/2010/main" Requires="p14">
-          <p:contentPart p14:bwMode="auto" r:id="rId5">
-            <p14:nvContentPartPr>
-              <p14:cNvPr id="2" name="Ink 1">
-                <a:extLst>
-                  <a:ext uri="{FF2B5EF4-FFF2-40B4-BE49-F238E27FC236}">
-                    <a16:creationId xmlns:a16="http://schemas.microsoft.com/office/drawing/2014/main" id="{905A919E-ABDE-686B-3318-8B61D729A2A1}"/>
-                  </a:ext>
-                </a:extLst>
-              </p14:cNvPr>
-              <p14:cNvContentPartPr/>
-              <p14:nvPr/>
-            </p14:nvContentPartPr>
-            <p14:xfrm>
-              <a:off x="1238175" y="2939115"/>
-              <a:ext cx="493920" cy="95760"/>
-            </p14:xfrm>
-          </p:contentPart>
-        </mc:Choice>
-        <mc:Fallback>
-          <p:pic>
-            <p:nvPicPr>
-              <p:cNvPr id="2" name="Ink 1">
-                <a:extLst>
-                  <a:ext uri="{FF2B5EF4-FFF2-40B4-BE49-F238E27FC236}">
-                    <a16:creationId xmlns:a16="http://schemas.microsoft.com/office/drawing/2014/main" id="{905A919E-ABDE-686B-3318-8B61D729A2A1}"/>
-                  </a:ext>
-                </a:extLst>
-              </p:cNvPr>
-              <p:cNvPicPr/>
-              <p:nvPr/>
-            </p:nvPicPr>
-            <p:blipFill>
-              <a:blip r:embed="rId6"/>
-              <a:stretch>
-                <a:fillRect/>
-              </a:stretch>
-            </p:blipFill>
-            <p:spPr>
-              <a:xfrm>
-                <a:off x="1202175" y="2903115"/>
-                <a:ext cx="565560" cy="167400"/>
-              </a:xfrm>
-              <a:prstGeom prst="rect">
-                <a:avLst/>
-              </a:prstGeom>
-            </p:spPr>
-          </p:pic>
-        </mc:Fallback>
-      </mc:AlternateContent>
-      <mc:AlternateContent xmlns:mc="http://schemas.openxmlformats.org/markup-compatibility/2006">
-        <mc:Choice xmlns:p14="http://schemas.microsoft.com/office/powerpoint/2010/main" Requires="p14">
-          <p:contentPart p14:bwMode="auto" r:id="rId7">
-            <p14:nvContentPartPr>
-              <p14:cNvPr id="5" name="Ink 4">
-                <a:extLst>
-                  <a:ext uri="{FF2B5EF4-FFF2-40B4-BE49-F238E27FC236}">
-                    <a16:creationId xmlns:a16="http://schemas.microsoft.com/office/drawing/2014/main" id="{DD5C5F55-BC63-8204-CBFF-1F4E658509C7}"/>
-                  </a:ext>
-                </a:extLst>
-              </p14:cNvPr>
-              <p14:cNvContentPartPr/>
-              <p14:nvPr/>
-            </p14:nvContentPartPr>
-            <p14:xfrm>
-              <a:off x="1323855" y="2561835"/>
-              <a:ext cx="360" cy="360"/>
-            </p14:xfrm>
-          </p:contentPart>
-        </mc:Choice>
-        <mc:Fallback>
-          <p:pic>
-            <p:nvPicPr>
-              <p:cNvPr id="5" name="Ink 4">
-                <a:extLst>
-                  <a:ext uri="{FF2B5EF4-FFF2-40B4-BE49-F238E27FC236}">
-                    <a16:creationId xmlns:a16="http://schemas.microsoft.com/office/drawing/2014/main" id="{DD5C5F55-BC63-8204-CBFF-1F4E658509C7}"/>
-                  </a:ext>
-                </a:extLst>
-              </p:cNvPr>
-              <p:cNvPicPr/>
-              <p:nvPr/>
-            </p:nvPicPr>
-            <p:blipFill>
-              <a:blip r:embed="rId8"/>
-              <a:stretch>
-                <a:fillRect/>
-              </a:stretch>
-            </p:blipFill>
-            <p:spPr>
-              <a:xfrm>
-                <a:off x="1287855" y="2525835"/>
-                <a:ext cx="72000" cy="72000"/>
-              </a:xfrm>
-              <a:prstGeom prst="rect">
-                <a:avLst/>
-              </a:prstGeom>
-            </p:spPr>
-          </p:pic>
-        </mc:Fallback>
-      </mc:AlternateContent>
-    </p:spTree>
-    <p:extLst>
-      <p:ext uri="{BB962C8B-B14F-4D97-AF65-F5344CB8AC3E}">
-        <p14:creationId xmlns:p14="http://schemas.microsoft.com/office/powerpoint/2010/main" val="3633352162"/>
-      </p:ext>
-    </p:extLst>
-  </p:cSld>
-  <p:clrMapOvr>
-    <a:masterClrMapping/>
-  </p:clrMapOvr>
-  <p:transition spd="slow">
-    <p:push dir="u"/>
-  </p:transition>
-</p:sld>
-</file>
-
 <file path=ppt/slides/slide8.xml><?xml version="1.0" encoding="utf-8"?>
 <p:sld xmlns:a="http://schemas.openxmlformats.org/drawingml/2006/main" xmlns:r="http://schemas.openxmlformats.org/officeDocument/2006/relationships" xmlns:p="http://schemas.openxmlformats.org/presentationml/2006/main">
   <p:cSld>
@@ -9646,281 +9558,339 @@
           <a:chExt cx="0" cy="0"/>
         </a:xfrm>
       </p:grpSpPr>
-      <p:sp>
-        <p:nvSpPr>
-          <p:cNvPr id="5" name="TextBox 4">
-            <a:extLst>
-              <a:ext uri="{FF2B5EF4-FFF2-40B4-BE49-F238E27FC236}">
-                <a16:creationId xmlns:a16="http://schemas.microsoft.com/office/drawing/2014/main" id="{7D7675C0-3693-C09B-EC62-E2B4B9D95D73}"/>
-              </a:ext>
-            </a:extLst>
-          </p:cNvPr>
-          <p:cNvSpPr txBox="1"/>
-          <p:nvPr/>
-        </p:nvSpPr>
-        <p:spPr>
-          <a:xfrm>
-            <a:off x="191643" y="290465"/>
-            <a:ext cx="11487912" cy="4154984"/>
-          </a:xfrm>
-          <a:prstGeom prst="rect">
-            <a:avLst/>
-          </a:prstGeom>
-          <a:noFill/>
-        </p:spPr>
-        <p:txBody>
-          <a:bodyPr wrap="square">
-            <a:spAutoFit/>
-          </a:bodyPr>
-          <a:lstStyle/>
-          <a:p>
-            <a:r>
-              <a:rPr lang="en-US" sz="2400" b="1" dirty="0">
-                <a:solidFill>
-                  <a:schemeClr val="accent4">
-                    <a:lumMod val="40000"/>
-                    <a:lumOff val="60000"/>
-                  </a:schemeClr>
-                </a:solidFill>
-                <a:latin typeface="Inter"/>
-              </a:rPr>
-              <a:t>Left-tailed test</a:t>
-            </a:r>
-            <a:r>
-              <a:rPr lang="en-US" sz="2400" b="1" dirty="0">
-                <a:solidFill>
-                  <a:schemeClr val="accent4">
-                    <a:lumMod val="40000"/>
-                    <a:lumOff val="60000"/>
-                  </a:schemeClr>
-                </a:solidFill>
-              </a:rPr>
-              <a:t> </a:t>
-            </a:r>
-          </a:p>
-          <a:p>
-            <a:r>
-              <a:rPr lang="en-US" sz="2400" b="1" dirty="0">
-                <a:solidFill>
-                  <a:schemeClr val="accent6">
-                    <a:lumMod val="60000"/>
-                    <a:lumOff val="40000"/>
-                  </a:schemeClr>
-                </a:solidFill>
-              </a:rPr>
-              <a:t>Example </a:t>
-            </a:r>
-            <a:r>
-              <a:rPr lang="en-US" sz="2400" dirty="0">
-                <a:solidFill>
-                  <a:schemeClr val="accent6">
-                    <a:lumMod val="60000"/>
-                    <a:lumOff val="40000"/>
-                  </a:schemeClr>
-                </a:solidFill>
-              </a:rPr>
-              <a:t>: A battery manufacturer claims that their new AA batteries last for </a:t>
-            </a:r>
-            <a:r>
-              <a:rPr lang="en-US" sz="2400" b="1" dirty="0">
-                <a:solidFill>
-                  <a:schemeClr val="accent6">
-                    <a:lumMod val="60000"/>
-                    <a:lumOff val="40000"/>
-                  </a:schemeClr>
-                </a:solidFill>
-              </a:rPr>
-              <a:t>exactly 50 hours</a:t>
-            </a:r>
-            <a:r>
-              <a:rPr lang="en-US" sz="2400" dirty="0">
-                <a:solidFill>
-                  <a:schemeClr val="accent6">
-                    <a:lumMod val="60000"/>
-                    <a:lumOff val="40000"/>
-                  </a:schemeClr>
-                </a:solidFill>
-              </a:rPr>
-              <a:t> of continuous use on average. A consumer protection agency wants to test if the batteries actually last </a:t>
-            </a:r>
-            <a:r>
-              <a:rPr lang="en-US" sz="2400" b="1" dirty="0">
-                <a:solidFill>
-                  <a:schemeClr val="accent6">
-                    <a:lumMod val="60000"/>
-                    <a:lumOff val="40000"/>
-                  </a:schemeClr>
-                </a:solidFill>
-              </a:rPr>
-              <a:t>shorter</a:t>
-            </a:r>
-            <a:r>
-              <a:rPr lang="en-US" sz="2400" dirty="0">
-                <a:solidFill>
-                  <a:schemeClr val="accent6">
-                    <a:lumMod val="60000"/>
-                    <a:lumOff val="40000"/>
-                  </a:schemeClr>
-                </a:solidFill>
-              </a:rPr>
-              <a:t> than claimed (the manufacturer might be overselling their product). </a:t>
-            </a:r>
-          </a:p>
-          <a:p>
-            <a:endParaRPr lang="en-US" sz="2400" dirty="0">
-              <a:solidFill>
-                <a:schemeClr val="accent6">
-                  <a:lumMod val="60000"/>
-                  <a:lumOff val="40000"/>
-                </a:schemeClr>
-              </a:solidFill>
-            </a:endParaRPr>
-          </a:p>
-          <a:p>
-            <a:r>
-              <a:rPr lang="en-US" sz="2400" dirty="0">
-                <a:solidFill>
-                  <a:schemeClr val="accent6">
-                    <a:lumMod val="60000"/>
-                    <a:lumOff val="40000"/>
-                  </a:schemeClr>
-                </a:solidFill>
-              </a:rPr>
-              <a:t>The hypothesis are</a:t>
-            </a:r>
-          </a:p>
-          <a:p>
-            <a:r>
-              <a:rPr lang="en-US" sz="2400" b="1" dirty="0">
-                <a:solidFill>
-                  <a:schemeClr val="accent6">
-                    <a:lumMod val="60000"/>
-                    <a:lumOff val="40000"/>
-                  </a:schemeClr>
-                </a:solidFill>
-              </a:rPr>
-              <a:t>Null Hypothesis (H₀):</a:t>
-            </a:r>
-            <a:r>
-              <a:rPr lang="en-US" sz="2400" dirty="0">
-                <a:solidFill>
-                  <a:schemeClr val="accent6">
-                    <a:lumMod val="60000"/>
-                    <a:lumOff val="40000"/>
-                  </a:schemeClr>
-                </a:solidFill>
-              </a:rPr>
-              <a:t>             μ = 50 hours (batteries last </a:t>
-            </a:r>
-            <a:r>
-              <a:rPr lang="en-US" sz="2400" b="1" dirty="0">
-                <a:solidFill>
-                  <a:schemeClr val="accent6">
-                    <a:lumMod val="60000"/>
-                    <a:lumOff val="40000"/>
-                  </a:schemeClr>
-                </a:solidFill>
-              </a:rPr>
-              <a:t>exactly</a:t>
-            </a:r>
-            <a:r>
-              <a:rPr lang="en-US" sz="2400" dirty="0">
-                <a:solidFill>
-                  <a:schemeClr val="accent6">
-                    <a:lumMod val="60000"/>
-                    <a:lumOff val="40000"/>
-                  </a:schemeClr>
-                </a:solidFill>
-              </a:rPr>
-              <a:t> as claimed)</a:t>
-            </a:r>
-          </a:p>
-          <a:p>
-            <a:r>
-              <a:rPr lang="en-US" sz="2400" b="1" dirty="0">
-                <a:solidFill>
-                  <a:schemeClr val="accent6">
-                    <a:lumMod val="60000"/>
-                    <a:lumOff val="40000"/>
-                  </a:schemeClr>
-                </a:solidFill>
-              </a:rPr>
-              <a:t>Alternative Hypothesis (H₁):</a:t>
-            </a:r>
-            <a:r>
-              <a:rPr lang="en-US" sz="2400" dirty="0">
-                <a:solidFill>
-                  <a:schemeClr val="accent6">
-                    <a:lumMod val="60000"/>
-                    <a:lumOff val="40000"/>
-                  </a:schemeClr>
-                </a:solidFill>
-              </a:rPr>
-              <a:t> μ &lt; 50 hours (batteries last </a:t>
-            </a:r>
-            <a:r>
-              <a:rPr lang="en-US" sz="2400" b="1" dirty="0">
-                <a:solidFill>
-                  <a:schemeClr val="accent6">
-                    <a:lumMod val="60000"/>
-                    <a:lumOff val="40000"/>
-                  </a:schemeClr>
-                </a:solidFill>
-              </a:rPr>
-              <a:t>shorter</a:t>
-            </a:r>
-            <a:r>
-              <a:rPr lang="en-US" sz="2400" dirty="0">
-                <a:solidFill>
-                  <a:schemeClr val="accent6">
-                    <a:lumMod val="60000"/>
-                    <a:lumOff val="40000"/>
-                  </a:schemeClr>
-                </a:solidFill>
-              </a:rPr>
-              <a:t> than claimed)</a:t>
-            </a:r>
-          </a:p>
-          <a:p>
-            <a:r>
-              <a:rPr lang="en-US" sz="2400" i="1" dirty="0">
-                <a:solidFill>
-                  <a:schemeClr val="accent6">
-                    <a:lumMod val="60000"/>
-                    <a:lumOff val="40000"/>
-                  </a:schemeClr>
-                </a:solidFill>
-                <a:latin typeface="Inter"/>
-              </a:rPr>
-              <a:t>This is left-tailed because we're testing if the battery life is </a:t>
-            </a:r>
-            <a:r>
-              <a:rPr lang="en-US" sz="2400" b="1" i="1" dirty="0">
-                <a:solidFill>
-                  <a:schemeClr val="accent6">
-                    <a:lumMod val="60000"/>
-                    <a:lumOff val="40000"/>
-                  </a:schemeClr>
-                </a:solidFill>
-                <a:latin typeface="Inter"/>
-              </a:rPr>
-              <a:t>significantly</a:t>
-            </a:r>
-            <a:r>
-              <a:rPr lang="en-US" sz="2400" i="1" dirty="0">
-                <a:solidFill>
-                  <a:schemeClr val="accent6">
-                    <a:lumMod val="60000"/>
-                    <a:lumOff val="40000"/>
-                  </a:schemeClr>
-                </a:solidFill>
-                <a:latin typeface="Inter"/>
-              </a:rPr>
-              <a:t> below the claimed threshold.</a:t>
-            </a:r>
-          </a:p>
-        </p:txBody>
-      </p:sp>
+      <mc:AlternateContent xmlns:mc="http://schemas.openxmlformats.org/markup-compatibility/2006">
+        <mc:Choice xmlns:a14="http://schemas.microsoft.com/office/drawing/2010/main" Requires="a14">
+          <p:sp>
+            <p:nvSpPr>
+              <p:cNvPr id="5" name="TextBox 4">
+                <a:extLst>
+                  <a:ext uri="{FF2B5EF4-FFF2-40B4-BE49-F238E27FC236}">
+                    <a16:creationId xmlns:a16="http://schemas.microsoft.com/office/drawing/2014/main" id="{7D7675C0-3693-C09B-EC62-E2B4B9D95D73}"/>
+                  </a:ext>
+                </a:extLst>
+              </p:cNvPr>
+              <p:cNvSpPr txBox="1"/>
+              <p:nvPr/>
+            </p:nvSpPr>
+            <p:spPr>
+              <a:xfrm>
+                <a:off x="91059" y="0"/>
+                <a:ext cx="11487912" cy="4154984"/>
+              </a:xfrm>
+              <a:prstGeom prst="rect">
+                <a:avLst/>
+              </a:prstGeom>
+              <a:noFill/>
+            </p:spPr>
+            <p:txBody>
+              <a:bodyPr wrap="square">
+                <a:spAutoFit/>
+              </a:bodyPr>
+              <a:lstStyle/>
+              <a:p>
+                <a:r>
+                  <a:rPr lang="en-US" sz="2400" b="1" dirty="0">
+                    <a:solidFill>
+                      <a:schemeClr val="accent6">
+                        <a:lumMod val="60000"/>
+                        <a:lumOff val="40000"/>
+                      </a:schemeClr>
+                    </a:solidFill>
+                    <a:latin typeface="Inter"/>
+                  </a:rPr>
+                  <a:t>Left-tailed test</a:t>
+                </a:r>
+                <a:endParaRPr lang="en-US" sz="2400" b="1" dirty="0">
+                  <a:solidFill>
+                    <a:schemeClr val="accent6">
+                      <a:lumMod val="60000"/>
+                      <a:lumOff val="40000"/>
+                    </a:schemeClr>
+                  </a:solidFill>
+                </a:endParaRPr>
+              </a:p>
+              <a:p>
+                <a:r>
+                  <a:rPr lang="en-US" sz="2400" b="1" dirty="0">
+                    <a:solidFill>
+                      <a:schemeClr val="accent6">
+                        <a:lumMod val="60000"/>
+                        <a:lumOff val="40000"/>
+                      </a:schemeClr>
+                    </a:solidFill>
+                  </a:rPr>
+                  <a:t>Example </a:t>
+                </a:r>
+                <a:r>
+                  <a:rPr lang="en-US" sz="2400" dirty="0">
+                    <a:solidFill>
+                      <a:schemeClr val="accent6">
+                        <a:lumMod val="60000"/>
+                        <a:lumOff val="40000"/>
+                      </a:schemeClr>
+                    </a:solidFill>
+                  </a:rPr>
+                  <a:t>: A school district claims that under its new curriculum, students score 85 or higher on average in the final exam. However, some parents believe that this new curriculum has caused scores to decrease.</a:t>
+                </a:r>
+              </a:p>
+              <a:p>
+                <a:endParaRPr lang="en-US" sz="2400" dirty="0">
+                  <a:solidFill>
+                    <a:schemeClr val="accent6">
+                      <a:lumMod val="60000"/>
+                      <a:lumOff val="40000"/>
+                    </a:schemeClr>
+                  </a:solidFill>
+                </a:endParaRPr>
+              </a:p>
+              <a:p>
+                <a:r>
+                  <a:rPr lang="en-US" sz="2400" dirty="0">
+                    <a:solidFill>
+                      <a:schemeClr val="accent6">
+                        <a:lumMod val="60000"/>
+                        <a:lumOff val="40000"/>
+                      </a:schemeClr>
+                    </a:solidFill>
+                  </a:rPr>
+                  <a:t>The hypothesis are</a:t>
+                </a:r>
+              </a:p>
+              <a:p>
+                <a:r>
+                  <a:rPr lang="en-US" sz="2400" b="1" dirty="0">
+                    <a:solidFill>
+                      <a:schemeClr val="accent6">
+                        <a:lumMod val="60000"/>
+                        <a:lumOff val="40000"/>
+                      </a:schemeClr>
+                    </a:solidFill>
+                  </a:rPr>
+                  <a:t>Null Hypothesis (H₀):</a:t>
+                </a:r>
+                <a:r>
+                  <a:rPr lang="en-US" sz="2400" dirty="0">
+                    <a:solidFill>
+                      <a:schemeClr val="accent6">
+                        <a:lumMod val="60000"/>
+                        <a:lumOff val="40000"/>
+                      </a:schemeClr>
+                    </a:solidFill>
+                  </a:rPr>
+                  <a:t>             μ </a:t>
+                </a:r>
+                <a14:m>
+                  <m:oMath xmlns:m="http://schemas.openxmlformats.org/officeDocument/2006/math">
+                    <m:r>
+                      <a:rPr lang="en-US" sz="2400" i="1" smtClean="0">
+                        <a:solidFill>
+                          <a:schemeClr val="accent6">
+                            <a:lumMod val="60000"/>
+                            <a:lumOff val="40000"/>
+                          </a:schemeClr>
+                        </a:solidFill>
+                        <a:latin typeface="Cambria Math" panose="02040503050406030204" pitchFamily="18" charset="0"/>
+                        <a:ea typeface="Cambria Math" panose="02040503050406030204" pitchFamily="18" charset="0"/>
+                      </a:rPr>
+                      <m:t>≥</m:t>
+                    </m:r>
+                  </m:oMath>
+                </a14:m>
+                <a:r>
+                  <a:rPr lang="en-US" sz="2400" dirty="0">
+                    <a:solidFill>
+                      <a:schemeClr val="accent6">
+                        <a:lumMod val="60000"/>
+                        <a:lumOff val="40000"/>
+                      </a:schemeClr>
+                    </a:solidFill>
+                  </a:rPr>
+                  <a:t> 85 (new curriculum did not change the scores)</a:t>
+                </a:r>
+              </a:p>
+              <a:p>
+                <a:r>
+                  <a:rPr lang="en-US" sz="2400" b="1" dirty="0">
+                    <a:solidFill>
+                      <a:schemeClr val="accent6">
+                        <a:lumMod val="60000"/>
+                        <a:lumOff val="40000"/>
+                      </a:schemeClr>
+                    </a:solidFill>
+                  </a:rPr>
+                  <a:t>Alternative Hypothesis (H₁):</a:t>
+                </a:r>
+                <a:r>
+                  <a:rPr lang="en-US" sz="2400" dirty="0">
+                    <a:solidFill>
+                      <a:schemeClr val="accent6">
+                        <a:lumMod val="60000"/>
+                        <a:lumOff val="40000"/>
+                      </a:schemeClr>
+                    </a:solidFill>
+                  </a:rPr>
+                  <a:t> μ &lt; 85 hours (new curriculum made score </a:t>
+                </a:r>
+                <a:r>
+                  <a:rPr lang="en-US" sz="2400" b="1" dirty="0">
+                    <a:solidFill>
+                      <a:schemeClr val="accent6">
+                        <a:lumMod val="60000"/>
+                        <a:lumOff val="40000"/>
+                      </a:schemeClr>
+                    </a:solidFill>
+                  </a:rPr>
+                  <a:t>drop</a:t>
+                </a:r>
+                <a:r>
+                  <a:rPr lang="en-US" sz="2400" dirty="0">
+                    <a:solidFill>
+                      <a:schemeClr val="accent6">
+                        <a:lumMod val="60000"/>
+                        <a:lumOff val="40000"/>
+                      </a:schemeClr>
+                    </a:solidFill>
+                  </a:rPr>
+                  <a:t>) </a:t>
+                </a:r>
+              </a:p>
+              <a:p>
+                <a:endParaRPr lang="en-US" sz="2400" dirty="0">
+                  <a:solidFill>
+                    <a:schemeClr val="accent6">
+                      <a:lumMod val="60000"/>
+                      <a:lumOff val="40000"/>
+                    </a:schemeClr>
+                  </a:solidFill>
+                </a:endParaRPr>
+              </a:p>
+              <a:p>
+                <a:r>
+                  <a:rPr lang="en-US" sz="2400" i="1" dirty="0">
+                    <a:solidFill>
+                      <a:schemeClr val="accent6">
+                        <a:lumMod val="60000"/>
+                        <a:lumOff val="40000"/>
+                      </a:schemeClr>
+                    </a:solidFill>
+                  </a:rPr>
+                  <a:t>This is a </a:t>
+                </a:r>
+                <a:r>
+                  <a:rPr lang="en-US" sz="2400" b="1" i="1" dirty="0">
+                    <a:solidFill>
+                      <a:schemeClr val="accent6">
+                        <a:lumMod val="60000"/>
+                        <a:lumOff val="40000"/>
+                      </a:schemeClr>
+                    </a:solidFill>
+                  </a:rPr>
+                  <a:t>left-tailed test</a:t>
+                </a:r>
+                <a:r>
+                  <a:rPr lang="en-US" sz="2400" i="1" dirty="0">
+                    <a:solidFill>
+                      <a:schemeClr val="accent6">
+                        <a:lumMod val="60000"/>
+                        <a:lumOff val="40000"/>
+                      </a:schemeClr>
+                    </a:solidFill>
+                  </a:rPr>
+                  <a:t> because we are testing if the </a:t>
+                </a:r>
+                <a:r>
+                  <a:rPr lang="en-US" sz="2400" b="1" i="1" dirty="0">
+                    <a:solidFill>
+                      <a:schemeClr val="accent6">
+                        <a:lumMod val="60000"/>
+                        <a:lumOff val="40000"/>
+                      </a:schemeClr>
+                    </a:solidFill>
+                  </a:rPr>
+                  <a:t>average test score</a:t>
+                </a:r>
+                <a:r>
+                  <a:rPr lang="en-US" sz="2400" i="1" dirty="0">
+                    <a:solidFill>
+                      <a:schemeClr val="accent6">
+                        <a:lumMod val="60000"/>
+                        <a:lumOff val="40000"/>
+                      </a:schemeClr>
+                    </a:solidFill>
+                  </a:rPr>
+                  <a:t> is significantly </a:t>
+                </a:r>
+                <a:r>
+                  <a:rPr lang="en-US" sz="2400" b="1" i="1" dirty="0">
+                    <a:solidFill>
+                      <a:schemeClr val="accent6">
+                        <a:lumMod val="60000"/>
+                        <a:lumOff val="40000"/>
+                      </a:schemeClr>
+                    </a:solidFill>
+                  </a:rPr>
+                  <a:t>below</a:t>
+                </a:r>
+                <a:r>
+                  <a:rPr lang="en-US" sz="2400" i="1" dirty="0">
+                    <a:solidFill>
+                      <a:schemeClr val="accent6">
+                        <a:lumMod val="60000"/>
+                        <a:lumOff val="40000"/>
+                      </a:schemeClr>
+                    </a:solidFill>
+                  </a:rPr>
+                  <a:t> the claimed threshold.</a:t>
+                </a:r>
+              </a:p>
+            </p:txBody>
+          </p:sp>
+        </mc:Choice>
+        <mc:Fallback>
+          <p:sp>
+            <p:nvSpPr>
+              <p:cNvPr id="5" name="TextBox 4">
+                <a:extLst>
+                  <a:ext uri="{FF2B5EF4-FFF2-40B4-BE49-F238E27FC236}">
+                    <a16:creationId xmlns:a16="http://schemas.microsoft.com/office/drawing/2014/main" id="{7D7675C0-3693-C09B-EC62-E2B4B9D95D73}"/>
+                  </a:ext>
+                </a:extLst>
+              </p:cNvPr>
+              <p:cNvSpPr txBox="1">
+                <a:spLocks noRot="1" noChangeAspect="1" noMove="1" noResize="1" noEditPoints="1" noAdjustHandles="1" noChangeArrowheads="1" noChangeShapeType="1" noTextEdit="1"/>
+              </p:cNvSpPr>
+              <p:nvPr/>
+            </p:nvSpPr>
+            <p:spPr>
+              <a:xfrm>
+                <a:off x="91059" y="0"/>
+                <a:ext cx="11487912" cy="4154984"/>
+              </a:xfrm>
+              <a:prstGeom prst="rect">
+                <a:avLst/>
+              </a:prstGeom>
+              <a:blipFill>
+                <a:blip r:embed="rId2"/>
+                <a:stretch>
+                  <a:fillRect l="-849" t="-1173" b="-2346"/>
+                </a:stretch>
+              </a:blipFill>
+            </p:spPr>
+            <p:txBody>
+              <a:bodyPr/>
+              <a:lstStyle/>
+              <a:p>
+                <a:r>
+                  <a:rPr lang="en-US">
+                    <a:noFill/>
+                  </a:rPr>
+                  <a:t> </a:t>
+                </a:r>
+              </a:p>
+            </p:txBody>
+          </p:sp>
+        </mc:Fallback>
+      </mc:AlternateContent>
       <p:pic>
         <p:nvPicPr>
           <p:cNvPr id="2" name="Picture 1">
@@ -9936,7 +9906,7 @@
           <p:nvPr/>
         </p:nvPicPr>
         <p:blipFill>
-          <a:blip r:embed="rId2">
+          <a:blip r:embed="rId3">
             <a:extLst>
               <a:ext uri="{28A0092B-C50C-407E-A947-70E740481C1C}">
                 <a14:useLocalDpi xmlns:a14="http://schemas.microsoft.com/office/drawing/2010/main" val="0"/>
@@ -9957,180 +9927,48 @@
           </a:prstGeom>
         </p:spPr>
       </p:pic>
-      <p:grpSp>
-        <p:nvGrpSpPr>
-          <p:cNvPr id="7" name="Group 6">
+      <p:sp>
+        <p:nvSpPr>
+          <p:cNvPr id="8" name="TextBox 7">
             <a:extLst>
               <a:ext uri="{FF2B5EF4-FFF2-40B4-BE49-F238E27FC236}">
-                <a16:creationId xmlns:a16="http://schemas.microsoft.com/office/drawing/2014/main" id="{2208C96C-B6E4-F4E7-41CD-D760E91EEF01}"/>
+                <a16:creationId xmlns:a16="http://schemas.microsoft.com/office/drawing/2014/main" id="{986713C9-620A-9BA3-8F19-EECF700BF2C8}"/>
               </a:ext>
             </a:extLst>
           </p:cNvPr>
-          <p:cNvGrpSpPr/>
+          <p:cNvSpPr txBox="1"/>
           <p:nvPr/>
-        </p:nvGrpSpPr>
-        <p:grpSpPr>
+        </p:nvSpPr>
+        <p:spPr>
           <a:xfrm>
-            <a:off x="6441624" y="5890536"/>
-            <a:ext cx="464400" cy="227160"/>
-            <a:chOff x="6441624" y="5890536"/>
-            <a:chExt cx="464400" cy="227160"/>
+            <a:off x="6364224" y="5806440"/>
+            <a:ext cx="418704" cy="369332"/>
           </a:xfrm>
-        </p:grpSpPr>
-        <mc:AlternateContent xmlns:mc="http://schemas.openxmlformats.org/markup-compatibility/2006" xmlns:p14="http://schemas.microsoft.com/office/powerpoint/2010/main">
-          <mc:Choice Requires="p14">
-            <p:contentPart p14:bwMode="auto" r:id="rId3">
-              <p14:nvContentPartPr>
-                <p14:cNvPr id="3" name="Ink 2">
-                  <a:extLst>
-                    <a:ext uri="{FF2B5EF4-FFF2-40B4-BE49-F238E27FC236}">
-                      <a16:creationId xmlns:a16="http://schemas.microsoft.com/office/drawing/2014/main" id="{A755DAB5-8F9A-8A8D-932F-775259FE17E9}"/>
-                    </a:ext>
-                  </a:extLst>
-                </p14:cNvPr>
-                <p14:cNvContentPartPr/>
-                <p14:nvPr/>
-              </p14:nvContentPartPr>
-              <p14:xfrm>
-                <a:off x="6513624" y="5890536"/>
-                <a:ext cx="135720" cy="171360"/>
-              </p14:xfrm>
-            </p:contentPart>
-          </mc:Choice>
-          <mc:Fallback xmlns="">
-            <p:pic>
-              <p:nvPicPr>
-                <p:cNvPr id="3" name="Ink 2">
-                  <a:extLst>
-                    <a:ext uri="{FF2B5EF4-FFF2-40B4-BE49-F238E27FC236}">
-                      <a16:creationId xmlns:a16="http://schemas.microsoft.com/office/drawing/2014/main" id="{A755DAB5-8F9A-8A8D-932F-775259FE17E9}"/>
-                    </a:ext>
-                  </a:extLst>
-                </p:cNvPr>
-                <p:cNvPicPr/>
-                <p:nvPr/>
-              </p:nvPicPr>
-              <p:blipFill>
-                <a:blip r:embed="rId4"/>
-                <a:stretch>
-                  <a:fillRect/>
-                </a:stretch>
-              </p:blipFill>
-              <p:spPr>
-                <a:xfrm>
-                  <a:off x="6477984" y="5854896"/>
-                  <a:ext cx="207360" cy="243000"/>
-                </a:xfrm>
-                <a:prstGeom prst="rect">
-                  <a:avLst/>
-                </a:prstGeom>
-              </p:spPr>
-            </p:pic>
-          </mc:Fallback>
-        </mc:AlternateContent>
-        <mc:AlternateContent xmlns:mc="http://schemas.openxmlformats.org/markup-compatibility/2006" xmlns:p14="http://schemas.microsoft.com/office/powerpoint/2010/main">
-          <mc:Choice Requires="p14">
-            <p:contentPart p14:bwMode="auto" r:id="rId5">
-              <p14:nvContentPartPr>
-                <p14:cNvPr id="4" name="Ink 3">
-                  <a:extLst>
-                    <a:ext uri="{FF2B5EF4-FFF2-40B4-BE49-F238E27FC236}">
-                      <a16:creationId xmlns:a16="http://schemas.microsoft.com/office/drawing/2014/main" id="{4F3C2117-7316-7B11-AE39-E005BA16D355}"/>
-                    </a:ext>
-                  </a:extLst>
-                </p14:cNvPr>
-                <p14:cNvContentPartPr/>
-                <p14:nvPr/>
-              </p14:nvContentPartPr>
-              <p14:xfrm>
-                <a:off x="6747624" y="5913936"/>
-                <a:ext cx="158400" cy="131760"/>
-              </p14:xfrm>
-            </p:contentPart>
-          </mc:Choice>
-          <mc:Fallback xmlns="">
-            <p:pic>
-              <p:nvPicPr>
-                <p:cNvPr id="4" name="Ink 3">
-                  <a:extLst>
-                    <a:ext uri="{FF2B5EF4-FFF2-40B4-BE49-F238E27FC236}">
-                      <a16:creationId xmlns:a16="http://schemas.microsoft.com/office/drawing/2014/main" id="{4F3C2117-7316-7B11-AE39-E005BA16D355}"/>
-                    </a:ext>
-                  </a:extLst>
-                </p:cNvPr>
-                <p:cNvPicPr/>
-                <p:nvPr/>
-              </p:nvPicPr>
-              <p:blipFill>
-                <a:blip r:embed="rId6"/>
-                <a:stretch>
-                  <a:fillRect/>
-                </a:stretch>
-              </p:blipFill>
-              <p:spPr>
-                <a:xfrm>
-                  <a:off x="6711984" y="5877936"/>
-                  <a:ext cx="230040" cy="203400"/>
-                </a:xfrm>
-                <a:prstGeom prst="rect">
-                  <a:avLst/>
-                </a:prstGeom>
-              </p:spPr>
-            </p:pic>
-          </mc:Fallback>
-        </mc:AlternateContent>
-        <mc:AlternateContent xmlns:mc="http://schemas.openxmlformats.org/markup-compatibility/2006" xmlns:p14="http://schemas.microsoft.com/office/powerpoint/2010/main">
-          <mc:Choice Requires="p14">
-            <p:contentPart p14:bwMode="auto" r:id="rId7">
-              <p14:nvContentPartPr>
-                <p14:cNvPr id="6" name="Ink 5">
-                  <a:extLst>
-                    <a:ext uri="{FF2B5EF4-FFF2-40B4-BE49-F238E27FC236}">
-                      <a16:creationId xmlns:a16="http://schemas.microsoft.com/office/drawing/2014/main" id="{CFEBAC1B-AEAD-B8D2-2E3B-4729A81C1362}"/>
-                    </a:ext>
-                  </a:extLst>
-                </p14:cNvPr>
-                <p14:cNvContentPartPr/>
-                <p14:nvPr/>
-              </p14:nvContentPartPr>
-              <p14:xfrm>
-                <a:off x="6441624" y="6094656"/>
-                <a:ext cx="61200" cy="23040"/>
-              </p14:xfrm>
-            </p:contentPart>
-          </mc:Choice>
-          <mc:Fallback xmlns="">
-            <p:pic>
-              <p:nvPicPr>
-                <p:cNvPr id="6" name="Ink 5">
-                  <a:extLst>
-                    <a:ext uri="{FF2B5EF4-FFF2-40B4-BE49-F238E27FC236}">
-                      <a16:creationId xmlns:a16="http://schemas.microsoft.com/office/drawing/2014/main" id="{CFEBAC1B-AEAD-B8D2-2E3B-4729A81C1362}"/>
-                    </a:ext>
-                  </a:extLst>
-                </p:cNvPr>
-                <p:cNvPicPr/>
-                <p:nvPr/>
-              </p:nvPicPr>
-              <p:blipFill>
-                <a:blip r:embed="rId8"/>
-                <a:stretch>
-                  <a:fillRect/>
-                </a:stretch>
-              </p:blipFill>
-              <p:spPr>
-                <a:xfrm>
-                  <a:off x="6405984" y="6059016"/>
-                  <a:ext cx="132840" cy="94680"/>
-                </a:xfrm>
-                <a:prstGeom prst="rect">
-                  <a:avLst/>
-                </a:prstGeom>
-              </p:spPr>
-            </p:pic>
-          </mc:Fallback>
-        </mc:AlternateContent>
-      </p:grpSp>
+          <a:prstGeom prst="rect">
+            <a:avLst/>
+          </a:prstGeom>
+          <a:noFill/>
+        </p:spPr>
+        <p:txBody>
+          <a:bodyPr wrap="none" rtlCol="0">
+            <a:spAutoFit/>
+          </a:bodyPr>
+          <a:lstStyle/>
+          <a:p>
+            <a:r>
+              <a:rPr lang="en-US" b="1" dirty="0">
+                <a:solidFill>
+                  <a:schemeClr val="accent4">
+                    <a:lumMod val="60000"/>
+                    <a:lumOff val="40000"/>
+                  </a:schemeClr>
+                </a:solidFill>
+              </a:rPr>
+              <a:t>85</a:t>
+            </a:r>
+          </a:p>
+        </p:txBody>
+      </p:sp>
     </p:spTree>
     <p:extLst>
       <p:ext uri="{BB962C8B-B14F-4D97-AF65-F5344CB8AC3E}">
